--- a/Presentations/Module_11_MVVM_Redo_Presentation.pptx
+++ b/Presentations/Module_11_MVVM_Redo_Presentation.pptx
@@ -2,31 +2,34 @@
 <file path=ppt/presentation.xml><?xml version="1.0" encoding="utf-8"?>
 <p:presentation xmlns:p="http://schemas.openxmlformats.org/presentationml/2006/main">
   <p:sldMasterIdLst>
-    <p:sldMasterId xmlns:r="http://schemas.openxmlformats.org/officeDocument/2006/relationships" id="2147483648" r:id="R770588dd57ef4c58"/>
+    <p:sldMasterId xmlns:r="http://schemas.openxmlformats.org/officeDocument/2006/relationships" id="2147483648" r:id="Rc58be6be6ef84d00"/>
   </p:sldMasterIdLst>
   <p:notesMasterIdLst>
-    <p:notesMasterId xmlns:r="http://schemas.openxmlformats.org/officeDocument/2006/relationships" r:id="R43911ce8b81541bd"/>
+    <p:notesMasterId xmlns:r="http://schemas.openxmlformats.org/officeDocument/2006/relationships" r:id="R24af0d7e17854d7b"/>
   </p:notesMasterIdLst>
   <p:sldIdLst>
-    <p:sldId xmlns:r="http://schemas.openxmlformats.org/officeDocument/2006/relationships" id="256" r:id="Re831b0be04774ef1"/>
-    <p:sldId xmlns:r="http://schemas.openxmlformats.org/officeDocument/2006/relationships" id="257" r:id="Reeaea530197b44e8"/>
-    <p:sldId xmlns:r="http://schemas.openxmlformats.org/officeDocument/2006/relationships" id="258" r:id="R2f71a8b53b924183"/>
-    <p:sldId xmlns:r="http://schemas.openxmlformats.org/officeDocument/2006/relationships" id="259" r:id="Rfacc10cd6b964a28"/>
-    <p:sldId xmlns:r="http://schemas.openxmlformats.org/officeDocument/2006/relationships" id="260" r:id="R0660f408820a4b5e"/>
-    <p:sldId xmlns:r="http://schemas.openxmlformats.org/officeDocument/2006/relationships" id="261" r:id="R0b72b6fa7fb24e22"/>
-    <p:sldId xmlns:r="http://schemas.openxmlformats.org/officeDocument/2006/relationships" id="262" r:id="R145164ec67ee4fc6"/>
-    <p:sldId xmlns:r="http://schemas.openxmlformats.org/officeDocument/2006/relationships" id="263" r:id="R6b79dedb09444055"/>
-    <p:sldId xmlns:r="http://schemas.openxmlformats.org/officeDocument/2006/relationships" id="264" r:id="Re2428e50de8644a2"/>
-    <p:sldId xmlns:r="http://schemas.openxmlformats.org/officeDocument/2006/relationships" id="265" r:id="R6a67cb6ab4ba4bb5"/>
-    <p:sldId xmlns:r="http://schemas.openxmlformats.org/officeDocument/2006/relationships" id="266" r:id="R0957fd19ffca4819"/>
-    <p:sldId xmlns:r="http://schemas.openxmlformats.org/officeDocument/2006/relationships" id="267" r:id="R2de4cec6d9064c6f"/>
-    <p:sldId xmlns:r="http://schemas.openxmlformats.org/officeDocument/2006/relationships" id="268" r:id="R1ebe2ae70d6b4ebe"/>
-    <p:sldId xmlns:r="http://schemas.openxmlformats.org/officeDocument/2006/relationships" id="269" r:id="Ra3e2c62456c94b6c"/>
-    <p:sldId xmlns:r="http://schemas.openxmlformats.org/officeDocument/2006/relationships" id="270" r:id="R3e541ac67932488f"/>
-    <p:sldId xmlns:r="http://schemas.openxmlformats.org/officeDocument/2006/relationships" id="271" r:id="R6d3b8a1bc2a44153"/>
-    <p:sldId xmlns:r="http://schemas.openxmlformats.org/officeDocument/2006/relationships" id="272" r:id="Reef651e9b5214736"/>
-    <p:sldId xmlns:r="http://schemas.openxmlformats.org/officeDocument/2006/relationships" id="273" r:id="R5c3954a9d61a46dd"/>
-    <p:sldId xmlns:r="http://schemas.openxmlformats.org/officeDocument/2006/relationships" id="274" r:id="Rd14cd54da1b6417d"/>
+    <p:sldId xmlns:r="http://schemas.openxmlformats.org/officeDocument/2006/relationships" id="256" r:id="R689408bd8c574017"/>
+    <p:sldId xmlns:r="http://schemas.openxmlformats.org/officeDocument/2006/relationships" id="257" r:id="R20502698d8454042"/>
+    <p:sldId xmlns:r="http://schemas.openxmlformats.org/officeDocument/2006/relationships" id="258" r:id="Re350ca33b8e54021"/>
+    <p:sldId xmlns:r="http://schemas.openxmlformats.org/officeDocument/2006/relationships" id="259" r:id="R53ca27e6c0954986"/>
+    <p:sldId xmlns:r="http://schemas.openxmlformats.org/officeDocument/2006/relationships" id="260" r:id="R29bd1ac4036542c1"/>
+    <p:sldId xmlns:r="http://schemas.openxmlformats.org/officeDocument/2006/relationships" id="261" r:id="R137402ecc1fd4b02"/>
+    <p:sldId xmlns:r="http://schemas.openxmlformats.org/officeDocument/2006/relationships" id="262" r:id="R7753d8345b9f49d1"/>
+    <p:sldId xmlns:r="http://schemas.openxmlformats.org/officeDocument/2006/relationships" id="263" r:id="Rf0bd65fe4e154873"/>
+    <p:sldId xmlns:r="http://schemas.openxmlformats.org/officeDocument/2006/relationships" id="264" r:id="R7ab53162b3234f90"/>
+    <p:sldId xmlns:r="http://schemas.openxmlformats.org/officeDocument/2006/relationships" id="265" r:id="Rb29ae6ca31f24f6b"/>
+    <p:sldId xmlns:r="http://schemas.openxmlformats.org/officeDocument/2006/relationships" id="266" r:id="R05996ab2e0d34158"/>
+    <p:sldId xmlns:r="http://schemas.openxmlformats.org/officeDocument/2006/relationships" id="267" r:id="Rd0804977d8bf448e"/>
+    <p:sldId xmlns:r="http://schemas.openxmlformats.org/officeDocument/2006/relationships" id="268" r:id="Rb99e4f74ff1f4da0"/>
+    <p:sldId xmlns:r="http://schemas.openxmlformats.org/officeDocument/2006/relationships" id="269" r:id="Re4b04780d2574f83"/>
+    <p:sldId xmlns:r="http://schemas.openxmlformats.org/officeDocument/2006/relationships" id="270" r:id="Rb1147de9a95a4160"/>
+    <p:sldId xmlns:r="http://schemas.openxmlformats.org/officeDocument/2006/relationships" id="271" r:id="Raf5324fb8ab24a4d"/>
+    <p:sldId xmlns:r="http://schemas.openxmlformats.org/officeDocument/2006/relationships" id="272" r:id="R75a86ec624374404"/>
+    <p:sldId xmlns:r="http://schemas.openxmlformats.org/officeDocument/2006/relationships" id="273" r:id="R0ed091c32e434747"/>
+    <p:sldId xmlns:r="http://schemas.openxmlformats.org/officeDocument/2006/relationships" id="274" r:id="R3979f81cfa9a4662"/>
+    <p:sldId xmlns:r="http://schemas.openxmlformats.org/officeDocument/2006/relationships" id="275" r:id="Rf92d261fc270406e"/>
+    <p:sldId xmlns:r="http://schemas.openxmlformats.org/officeDocument/2006/relationships" id="276" r:id="Rbfa261a2e4ed4b69"/>
+    <p:sldId xmlns:r="http://schemas.openxmlformats.org/officeDocument/2006/relationships" id="277" r:id="R251bed488d3542ea"/>
   </p:sldIdLst>
   <p:sldSz cx="12192000" cy="6858000"/>
   <p:notesSz cx="6858000" cy="9144000"/>
@@ -587,7 +590,7 @@
           <a:lstStyle xmlns:a="http://schemas.openxmlformats.org/drawingml/2006/main"/>
           <a:p xmlns:a="http://schemas.openxmlformats.org/drawingml/2006/main">
             <a:r>
-              <a:t>Introduce Module 11. Open the matching Word tutorial after the exercise overview.</a:t>
+              <a:t>Open the matching Word tutorial after the exercise overview. Source: Module 11 Word tutorial.</a:t>
             </a:r>
           </a:p>
         </p:txBody>
@@ -657,7 +660,7 @@
           <a:lstStyle xmlns:a="http://schemas.openxmlformats.org/drawingml/2006/main"/>
           <a:p xmlns:a="http://schemas.openxmlformats.org/drawingml/2006/main">
             <a:r>
-              <a:t>After tutorial Step 5: run the app or inspect the code. Ask students to explain the observed result. Source: Module 11 Word tutorial.</a:t>
+              <a:t>After tutorial Step 3: run the app or inspect the code. Ask students to explain the observed result. Source: Module 11 Word tutorial.</a:t>
             </a:r>
           </a:p>
         </p:txBody>
@@ -727,7 +730,7 @@
           <a:lstStyle xmlns:a="http://schemas.openxmlformats.org/drawingml/2006/main"/>
           <a:p xmlns:a="http://schemas.openxmlformats.org/drawingml/2006/main">
             <a:r>
-              <a:t>Before tutorial Step 7: explain these concepts. Ask students to predict what the change will do. Then open Step 7 in the Word tutorial. Source: Module 11 Word tutorial.</a:t>
+              <a:t>Before tutorial Step 5: explain these concepts. Ask students to predict what the change will do. Then open Step 5 in the Word tutorial. Source: Module 11 Word tutorial. Related MAUI documentation: https://learn.microsoft.com/dotnet/maui/xaml/fundamentals/mvvm</a:t>
             </a:r>
           </a:p>
         </p:txBody>
@@ -797,7 +800,7 @@
           <a:lstStyle xmlns:a="http://schemas.openxmlformats.org/drawingml/2006/main"/>
           <a:p xmlns:a="http://schemas.openxmlformats.org/drawingml/2006/main">
             <a:r>
-              <a:t>After tutorial Step 7: run the app or inspect the code. Ask students to explain the observed result. Source: Module 11 Word tutorial.</a:t>
+              <a:t>After tutorial Step 5: run the app or inspect the code. Ask students to explain the observed result. Source: Module 11 Word tutorial.</a:t>
             </a:r>
           </a:p>
         </p:txBody>
@@ -867,7 +870,7 @@
           <a:lstStyle xmlns:a="http://schemas.openxmlformats.org/drawingml/2006/main"/>
           <a:p xmlns:a="http://schemas.openxmlformats.org/drawingml/2006/main">
             <a:r>
-              <a:t>Before tutorial Step 9: explain these concepts. Ask students to predict what the change will do. Then open Step 9 in the Word tutorial. Source: Module 11 Word tutorial.</a:t>
+              <a:t>Before tutorial Step 7: explain these concepts. Ask students to predict what the change will do. Then open Step 7 in the Word tutorial. Source: Module 11 Word tutorial. Related MAUI documentation: https://learn.microsoft.com/dotnet/maui/xaml/fundamentals/mvvm</a:t>
             </a:r>
           </a:p>
         </p:txBody>
@@ -937,7 +940,7 @@
           <a:lstStyle xmlns:a="http://schemas.openxmlformats.org/drawingml/2006/main"/>
           <a:p xmlns:a="http://schemas.openxmlformats.org/drawingml/2006/main">
             <a:r>
-              <a:t>After tutorial Step 9: run the app or inspect the code. Ask students to explain the observed result. Source: Module 11 Word tutorial.</a:t>
+              <a:t>After tutorial Step 7: run the app or inspect the code. Ask students to explain the observed result. Source: Module 11 Word tutorial.</a:t>
             </a:r>
           </a:p>
         </p:txBody>
@@ -1007,7 +1010,7 @@
           <a:lstStyle xmlns:a="http://schemas.openxmlformats.org/drawingml/2006/main"/>
           <a:p xmlns:a="http://schemas.openxmlformats.org/drawingml/2006/main">
             <a:r>
-              <a:t>Before tutorial Step 10: explain these concepts. Ask students to predict what the change will do. Then open Step 10 in the Word tutorial. Source: Module 11 Word tutorial.</a:t>
+              <a:t>Before tutorial Step 9: explain these concepts. Ask students to predict what the change will do. Then open Step 9 in the Word tutorial. Source: Module 11 Word tutorial. Related MAUI documentation: https://learn.microsoft.com/dotnet/maui/xaml/fundamentals/mvvm</a:t>
             </a:r>
           </a:p>
         </p:txBody>
@@ -1077,7 +1080,7 @@
           <a:lstStyle xmlns:a="http://schemas.openxmlformats.org/drawingml/2006/main"/>
           <a:p xmlns:a="http://schemas.openxmlformats.org/drawingml/2006/main">
             <a:r>
-              <a:t>After tutorial Step 10: run the app or inspect the code. Ask students to explain the observed result. Source: Module 11 Word tutorial.</a:t>
+              <a:t>After tutorial Step 9: run the app or inspect the code. Ask students to explain the observed result. Source: Module 11 Word tutorial.</a:t>
             </a:r>
           </a:p>
         </p:txBody>
@@ -1147,7 +1150,7 @@
           <a:lstStyle xmlns:a="http://schemas.openxmlformats.org/drawingml/2006/main"/>
           <a:p xmlns:a="http://schemas.openxmlformats.org/drawingml/2006/main">
             <a:r>
-              <a:t>Before tutorial Step 11: explain these concepts. Ask students to predict what the change will do. Then open Step 11 in the Word tutorial. Source: Module 11 Word tutorial.</a:t>
+              <a:t>Before tutorial Step 10: explain these concepts. Ask students to predict what the change will do. Then open Step 10 in the Word tutorial. Source: Module 11 Word tutorial. Related MAUI documentation: https://learn.microsoft.com/dotnet/maui/xaml/fundamentals/mvvm</a:t>
             </a:r>
           </a:p>
         </p:txBody>
@@ -1217,7 +1220,7 @@
           <a:lstStyle xmlns:a="http://schemas.openxmlformats.org/drawingml/2006/main"/>
           <a:p xmlns:a="http://schemas.openxmlformats.org/drawingml/2006/main">
             <a:r>
-              <a:t>After tutorial Step 11: run the app or inspect the code. Ask students to explain the observed result. Source: Module 11 Word tutorial.</a:t>
+              <a:t>After tutorial Step 10: run the app or inspect the code. Ask students to explain the observed result. Source: Module 11 Word tutorial.</a:t>
             </a:r>
           </a:p>
         </p:txBody>
@@ -1287,7 +1290,7 @@
           <a:lstStyle xmlns:a="http://schemas.openxmlformats.org/drawingml/2006/main"/>
           <a:p xmlns:a="http://schemas.openxmlformats.org/drawingml/2006/main">
             <a:r>
-              <a:t>Use the final tutorial checklist. Ask students to explain the module concept without reading code. Source: Module 11 Word tutorial.</a:t>
+              <a:t>Before tutorial Step 11: explain these concepts. Ask students to predict what the change will do. Then open Step 11 in the Word tutorial. Source: Module 11 Word tutorial. Related MAUI documentation: https://learn.microsoft.com/dotnet/maui/xaml/fundamentals/mvvm</a:t>
             </a:r>
           </a:p>
         </p:txBody>
@@ -1357,7 +1360,217 @@
           <a:lstStyle xmlns:a="http://schemas.openxmlformats.org/drawingml/2006/main"/>
           <a:p xmlns:a="http://schemas.openxmlformats.org/drawingml/2006/main">
             <a:r>
-              <a:t>Explain the work for Module 11. Show the expected app result before students start. Source: Module 11 Word tutorial.</a:t>
+              <a:t>Give students the outcome before they start. Source: Module 11 Word tutorial.</a:t>
+            </a:r>
+          </a:p>
+        </p:txBody>
+      </p:sp>
+      <p:sp>
+        <p:nvSpPr>
+          <p:cNvPr id="4" name="Slide Number Placeholder 3"/>
+          <p:cNvSpPr>
+            <a:spLocks xmlns:a="http://schemas.openxmlformats.org/drawingml/2006/main" noGrp="1"/>
+          </p:cNvSpPr>
+          <p:nvPr>
+            <p:ph type="sldNum" idx="5"/>
+          </p:nvPr>
+        </p:nvSpPr>
+        <p:spPr/>
+        <p:txBody>
+          <a:bodyPr xmlns:a="http://schemas.openxmlformats.org/drawingml/2006/main"/>
+          <a:lstStyle xmlns:a="http://schemas.openxmlformats.org/drawingml/2006/main"/>
+          <a:p xmlns:a="http://schemas.openxmlformats.org/drawingml/2006/main"/>
+        </p:txBody>
+      </p:sp>
+    </p:spTree>
+  </p:cSld>
+  <p:clrMapOvr>
+    <a:masterClrMapping xmlns:a="http://schemas.openxmlformats.org/drawingml/2006/main"/>
+  </p:clrMapOvr>
+</p:notes>
+</file>
+
+<file path=ppt/notesSlides/notesSlide20.xml><?xml version="1.0" encoding="utf-8"?>
+<p:notes xmlns:p="http://schemas.openxmlformats.org/presentationml/2006/main">
+  <p:cSld>
+    <p:spTree>
+      <p:nvGrpSpPr>
+        <p:cNvPr id="1" name=""/>
+        <p:cNvGrpSpPr/>
+        <p:nvPr/>
+      </p:nvGrpSpPr>
+      <p:grpSpPr>
+        <a:xfrm xmlns:a="http://schemas.openxmlformats.org/drawingml/2006/main"/>
+      </p:grpSpPr>
+      <p:sp>
+        <p:nvSpPr>
+          <p:cNvPr id="2" name="Slide Image Placeholder 1"/>
+          <p:cNvSpPr>
+            <a:spLocks xmlns:a="http://schemas.openxmlformats.org/drawingml/2006/main" noGrp="1"/>
+          </p:cNvSpPr>
+          <p:nvPr>
+            <p:ph type="sldImg" idx="0"/>
+          </p:nvPr>
+        </p:nvSpPr>
+        <p:spPr/>
+      </p:sp>
+      <p:sp>
+        <p:nvSpPr>
+          <p:cNvPr id="3" name="Notes Placeholder 2"/>
+          <p:cNvSpPr>
+            <a:spLocks xmlns:a="http://schemas.openxmlformats.org/drawingml/2006/main" noGrp="1"/>
+          </p:cNvSpPr>
+          <p:nvPr>
+            <p:ph type="body" idx="1"/>
+          </p:nvPr>
+        </p:nvSpPr>
+        <p:spPr/>
+        <p:txBody>
+          <a:bodyPr xmlns:a="http://schemas.openxmlformats.org/drawingml/2006/main"/>
+          <a:lstStyle xmlns:a="http://schemas.openxmlformats.org/drawingml/2006/main"/>
+          <a:p xmlns:a="http://schemas.openxmlformats.org/drawingml/2006/main">
+            <a:r>
+              <a:t>After tutorial Step 11: run the app or inspect the code. Ask students to explain the observed result. Source: Module 11 Word tutorial.</a:t>
+            </a:r>
+          </a:p>
+        </p:txBody>
+      </p:sp>
+      <p:sp>
+        <p:nvSpPr>
+          <p:cNvPr id="4" name="Slide Number Placeholder 3"/>
+          <p:cNvSpPr>
+            <a:spLocks xmlns:a="http://schemas.openxmlformats.org/drawingml/2006/main" noGrp="1"/>
+          </p:cNvSpPr>
+          <p:nvPr>
+            <p:ph type="sldNum" idx="5"/>
+          </p:nvPr>
+        </p:nvSpPr>
+        <p:spPr/>
+        <p:txBody>
+          <a:bodyPr xmlns:a="http://schemas.openxmlformats.org/drawingml/2006/main"/>
+          <a:lstStyle xmlns:a="http://schemas.openxmlformats.org/drawingml/2006/main"/>
+          <a:p xmlns:a="http://schemas.openxmlformats.org/drawingml/2006/main"/>
+        </p:txBody>
+      </p:sp>
+    </p:spTree>
+  </p:cSld>
+  <p:clrMapOvr>
+    <a:masterClrMapping xmlns:a="http://schemas.openxmlformats.org/drawingml/2006/main"/>
+  </p:clrMapOvr>
+</p:notes>
+</file>
+
+<file path=ppt/notesSlides/notesSlide21.xml><?xml version="1.0" encoding="utf-8"?>
+<p:notes xmlns:p="http://schemas.openxmlformats.org/presentationml/2006/main">
+  <p:cSld>
+    <p:spTree>
+      <p:nvGrpSpPr>
+        <p:cNvPr id="1" name=""/>
+        <p:cNvGrpSpPr/>
+        <p:nvPr/>
+      </p:nvGrpSpPr>
+      <p:grpSpPr>
+        <a:xfrm xmlns:a="http://schemas.openxmlformats.org/drawingml/2006/main"/>
+      </p:grpSpPr>
+      <p:sp>
+        <p:nvSpPr>
+          <p:cNvPr id="2" name="Slide Image Placeholder 1"/>
+          <p:cNvSpPr>
+            <a:spLocks xmlns:a="http://schemas.openxmlformats.org/drawingml/2006/main" noGrp="1"/>
+          </p:cNvSpPr>
+          <p:nvPr>
+            <p:ph type="sldImg" idx="0"/>
+          </p:nvPr>
+        </p:nvSpPr>
+        <p:spPr/>
+      </p:sp>
+      <p:sp>
+        <p:nvSpPr>
+          <p:cNvPr id="3" name="Notes Placeholder 2"/>
+          <p:cNvSpPr>
+            <a:spLocks xmlns:a="http://schemas.openxmlformats.org/drawingml/2006/main" noGrp="1"/>
+          </p:cNvSpPr>
+          <p:nvPr>
+            <p:ph type="body" idx="1"/>
+          </p:nvPr>
+        </p:nvSpPr>
+        <p:spPr/>
+        <p:txBody>
+          <a:bodyPr xmlns:a="http://schemas.openxmlformats.org/drawingml/2006/main"/>
+          <a:lstStyle xmlns:a="http://schemas.openxmlformats.org/drawingml/2006/main"/>
+          <a:p xmlns:a="http://schemas.openxmlformats.org/drawingml/2006/main">
+            <a:r>
+              <a:t>Use the final tutorial checklist. Ask students to explain the module concept without reading code. Source: Module 11 Word tutorial.</a:t>
+            </a:r>
+          </a:p>
+        </p:txBody>
+      </p:sp>
+      <p:sp>
+        <p:nvSpPr>
+          <p:cNvPr id="4" name="Slide Number Placeholder 3"/>
+          <p:cNvSpPr>
+            <a:spLocks xmlns:a="http://schemas.openxmlformats.org/drawingml/2006/main" noGrp="1"/>
+          </p:cNvSpPr>
+          <p:nvPr>
+            <p:ph type="sldNum" idx="5"/>
+          </p:nvPr>
+        </p:nvSpPr>
+        <p:spPr/>
+        <p:txBody>
+          <a:bodyPr xmlns:a="http://schemas.openxmlformats.org/drawingml/2006/main"/>
+          <a:lstStyle xmlns:a="http://schemas.openxmlformats.org/drawingml/2006/main"/>
+          <a:p xmlns:a="http://schemas.openxmlformats.org/drawingml/2006/main"/>
+        </p:txBody>
+      </p:sp>
+    </p:spTree>
+  </p:cSld>
+  <p:clrMapOvr>
+    <a:masterClrMapping xmlns:a="http://schemas.openxmlformats.org/drawingml/2006/main"/>
+  </p:clrMapOvr>
+</p:notes>
+</file>
+
+<file path=ppt/notesSlides/notesSlide22.xml><?xml version="1.0" encoding="utf-8"?>
+<p:notes xmlns:p="http://schemas.openxmlformats.org/presentationml/2006/main">
+  <p:cSld>
+    <p:spTree>
+      <p:nvGrpSpPr>
+        <p:cNvPr id="1" name=""/>
+        <p:cNvGrpSpPr/>
+        <p:nvPr/>
+      </p:nvGrpSpPr>
+      <p:grpSpPr>
+        <a:xfrm xmlns:a="http://schemas.openxmlformats.org/drawingml/2006/main"/>
+      </p:grpSpPr>
+      <p:sp>
+        <p:nvSpPr>
+          <p:cNvPr id="2" name="Slide Image Placeholder 1"/>
+          <p:cNvSpPr>
+            <a:spLocks xmlns:a="http://schemas.openxmlformats.org/drawingml/2006/main" noGrp="1"/>
+          </p:cNvSpPr>
+          <p:nvPr>
+            <p:ph type="sldImg" idx="0"/>
+          </p:nvPr>
+        </p:nvSpPr>
+        <p:spPr/>
+      </p:sp>
+      <p:sp>
+        <p:nvSpPr>
+          <p:cNvPr id="3" name="Notes Placeholder 2"/>
+          <p:cNvSpPr>
+            <a:spLocks xmlns:a="http://schemas.openxmlformats.org/drawingml/2006/main" noGrp="1"/>
+          </p:cNvSpPr>
+          <p:nvPr>
+            <p:ph type="body" idx="1"/>
+          </p:nvPr>
+        </p:nvSpPr>
+        <p:spPr/>
+        <p:txBody>
+          <a:bodyPr xmlns:a="http://schemas.openxmlformats.org/drawingml/2006/main"/>
+          <a:lstStyle xmlns:a="http://schemas.openxmlformats.org/drawingml/2006/main"/>
+          <a:p xmlns:a="http://schemas.openxmlformats.org/drawingml/2006/main">
+            <a:r>
+              <a:t>Student reading: Data binding and MVVM. https://learn.microsoft.com/dotnet/maui/xaml/fundamentals/mvvm</a:t>
             </a:r>
           </a:p>
         </p:txBody>
@@ -1427,7 +1640,7 @@
           <a:lstStyle xmlns:a="http://schemas.openxmlformats.org/drawingml/2006/main"/>
           <a:p xmlns:a="http://schemas.openxmlformats.org/drawingml/2006/main">
             <a:r>
-              <a:t>Before tutorial Step 1: explain these concepts. Ask students to predict what the change will do. Then open Step 1 in the Word tutorial. Source: Module 11 Word tutorial.</a:t>
+              <a:t>Explain the framework idea before the first exercise step. MAUI documentation: https://learn.microsoft.com/dotnet/maui/xaml/fundamentals/mvvm</a:t>
             </a:r>
           </a:p>
         </p:txBody>
@@ -1497,7 +1710,7 @@
           <a:lstStyle xmlns:a="http://schemas.openxmlformats.org/drawingml/2006/main"/>
           <a:p xmlns:a="http://schemas.openxmlformats.org/drawingml/2006/main">
             <a:r>
-              <a:t>After tutorial Step 1: run the app or inspect the code. Ask students to explain the observed result. Source: Module 11 Word tutorial.</a:t>
+              <a:t>Ask students to identify the C# object, the XAML control, and the connection between them. Source: Module 11 Word tutorial. MAUI documentation: https://learn.microsoft.com/dotnet/maui/xaml/fundamentals/mvvm</a:t>
             </a:r>
           </a:p>
         </p:txBody>
@@ -1567,7 +1780,7 @@
           <a:lstStyle xmlns:a="http://schemas.openxmlformats.org/drawingml/2006/main"/>
           <a:p xmlns:a="http://schemas.openxmlformats.org/drawingml/2006/main">
             <a:r>
-              <a:t>Before tutorial Step 2: explain these concepts. Ask students to predict what the change will do. Then open Step 2 in the Word tutorial. Source: Module 11 Word tutorial.</a:t>
+              <a:t>Before tutorial Step 1: explain these concepts. Ask students to predict what the change will do. Then open Step 1 in the Word tutorial. Source: Module 11 Word tutorial. Related MAUI documentation: https://learn.microsoft.com/dotnet/maui/xaml/fundamentals/mvvm</a:t>
             </a:r>
           </a:p>
         </p:txBody>
@@ -1637,7 +1850,7 @@
           <a:lstStyle xmlns:a="http://schemas.openxmlformats.org/drawingml/2006/main"/>
           <a:p xmlns:a="http://schemas.openxmlformats.org/drawingml/2006/main">
             <a:r>
-              <a:t>After tutorial Step 2: run the app or inspect the code. Ask students to explain the observed result. Source: Module 11 Word tutorial.</a:t>
+              <a:t>After tutorial Step 1: run the app or inspect the code. Ask students to explain the observed result. Source: Module 11 Word tutorial.</a:t>
             </a:r>
           </a:p>
         </p:txBody>
@@ -1707,7 +1920,7 @@
           <a:lstStyle xmlns:a="http://schemas.openxmlformats.org/drawingml/2006/main"/>
           <a:p xmlns:a="http://schemas.openxmlformats.org/drawingml/2006/main">
             <a:r>
-              <a:t>Before tutorial Step 3: explain these concepts. Ask students to predict what the change will do. Then open Step 3 in the Word tutorial. Source: Module 11 Word tutorial.</a:t>
+              <a:t>Before tutorial Step 2: explain these concepts. Ask students to predict what the change will do. Then open Step 2 in the Word tutorial. Source: Module 11 Word tutorial. Related MAUI documentation: https://learn.microsoft.com/dotnet/maui/xaml/fundamentals/mvvm</a:t>
             </a:r>
           </a:p>
         </p:txBody>
@@ -1777,7 +1990,7 @@
           <a:lstStyle xmlns:a="http://schemas.openxmlformats.org/drawingml/2006/main"/>
           <a:p xmlns:a="http://schemas.openxmlformats.org/drawingml/2006/main">
             <a:r>
-              <a:t>After tutorial Step 3: run the app or inspect the code. Ask students to explain the observed result. Source: Module 11 Word tutorial.</a:t>
+              <a:t>After tutorial Step 2: run the app or inspect the code. Ask students to explain the observed result. Source: Module 11 Word tutorial.</a:t>
             </a:r>
           </a:p>
         </p:txBody>
@@ -1847,7 +2060,7 @@
           <a:lstStyle xmlns:a="http://schemas.openxmlformats.org/drawingml/2006/main"/>
           <a:p xmlns:a="http://schemas.openxmlformats.org/drawingml/2006/main">
             <a:r>
-              <a:t>Before tutorial Step 5: explain these concepts. Ask students to predict what the change will do. Then open Step 5 in the Word tutorial. Source: Module 11 Word tutorial.</a:t>
+              <a:t>Before tutorial Step 3: explain these concepts. Ask students to predict what the change will do. Then open Step 3 in the Word tutorial. Source: Module 11 Word tutorial. Related MAUI documentation: https://learn.microsoft.com/dotnet/maui/xaml/fundamentals/mvvm</a:t>
             </a:r>
           </a:p>
         </p:txBody>
@@ -1957,7 +2170,7 @@
           <p:cNvPr id="14" name="Picture 13">
             <a:extLst xmlns:a="http://schemas.openxmlformats.org/drawingml/2006/main">
               <a:ext uri="{FF2B5EF4-FFF2-40B4-BE49-F238E27FC236}">
-                <a16:creationId xmlns:a16="http://schemas.microsoft.com/office/drawing/2014/main" id="{C3F05ABE-53ED-49DE-ADDD-2C2D28666849}"/>
+                <a16:creationId xmlns:a16="http://schemas.microsoft.com/office/drawing/2014/main" id="{FCA9BA37-176A-4E96-895D-B473BFF47FE3}"/>
               </a:ext>
             </a:extLst>
           </p:cNvPr>
@@ -1967,7 +2180,7 @@
           <p:nvPr/>
         </p:nvPicPr>
         <p:blipFill>
-          <a:blip xmlns:r="http://schemas.openxmlformats.org/officeDocument/2006/relationships" xmlns:a="http://schemas.openxmlformats.org/drawingml/2006/main" r:embed="R8c27091e576e4e8c">
+          <a:blip xmlns:r="http://schemas.openxmlformats.org/officeDocument/2006/relationships" xmlns:a="http://schemas.openxmlformats.org/drawingml/2006/main" r:embed="R6e872e854dca46d5">
             <a:alphaModFix amt="40000"/>
           </a:blip>
           <a:stretch xmlns:a="http://schemas.openxmlformats.org/drawingml/2006/main">
@@ -2130,7 +2343,7 @@
           <p:cNvPr id="2" name="Title 1">
             <a:extLst xmlns:a="http://schemas.openxmlformats.org/drawingml/2006/main">
               <a:ext uri="{FF2B5EF4-FFF2-40B4-BE49-F238E27FC236}">
-                <a16:creationId xmlns:a16="http://schemas.microsoft.com/office/drawing/2014/main" id="{F05BD009-5334-40F9-B023-996F8EC89FFF}"/>
+                <a16:creationId xmlns:a16="http://schemas.microsoft.com/office/drawing/2014/main" id="{90008D03-D167-4C59-B4A4-9EAF8E61241A}"/>
               </a:ext>
             </a:extLst>
           </p:cNvPr>
@@ -2177,7 +2390,7 @@
           <p:cNvPr id="3" name="Subtitle 2">
             <a:extLst xmlns:a="http://schemas.openxmlformats.org/drawingml/2006/main">
               <a:ext uri="{FF2B5EF4-FFF2-40B4-BE49-F238E27FC236}">
-                <a16:creationId xmlns:a16="http://schemas.microsoft.com/office/drawing/2014/main" id="{A531429F-C247-4589-964B-26F4106739BD}"/>
+                <a16:creationId xmlns:a16="http://schemas.microsoft.com/office/drawing/2014/main" id="{CE6D10C9-0CDA-44A1-ABA7-351DD9810C5D}"/>
               </a:ext>
             </a:extLst>
           </p:cNvPr>
@@ -2305,7 +2518,7 @@
           <p:cNvPr id="4" name="Date Placeholder 3">
             <a:extLst xmlns:a="http://schemas.openxmlformats.org/drawingml/2006/main">
               <a:ext uri="{FF2B5EF4-FFF2-40B4-BE49-F238E27FC236}">
-                <a16:creationId xmlns:a16="http://schemas.microsoft.com/office/drawing/2014/main" id="{F701B4F3-D5B4-40FE-AC6C-32ABDFBC1547}"/>
+                <a16:creationId xmlns:a16="http://schemas.microsoft.com/office/drawing/2014/main" id="{AA759099-D785-407B-9A12-A25B2681FD6B}"/>
               </a:ext>
             </a:extLst>
           </p:cNvPr>
@@ -2333,7 +2546,7 @@
           <p:cNvPr id="5" name="Footer Placeholder 4">
             <a:extLst xmlns:a="http://schemas.openxmlformats.org/drawingml/2006/main">
               <a:ext uri="{FF2B5EF4-FFF2-40B4-BE49-F238E27FC236}">
-                <a16:creationId xmlns:a16="http://schemas.microsoft.com/office/drawing/2014/main" id="{0F1DD17A-1DA8-44EF-803C-A6AAA95AD087}"/>
+                <a16:creationId xmlns:a16="http://schemas.microsoft.com/office/drawing/2014/main" id="{C12D990E-1D7B-4726-A22E-F8C76DE569A3}"/>
               </a:ext>
             </a:extLst>
           </p:cNvPr>
@@ -2358,7 +2571,7 @@
           <p:cNvPr id="6" name="Slide Number Placeholder 5">
             <a:extLst xmlns:a="http://schemas.openxmlformats.org/drawingml/2006/main">
               <a:ext uri="{FF2B5EF4-FFF2-40B4-BE49-F238E27FC236}">
-                <a16:creationId xmlns:a16="http://schemas.microsoft.com/office/drawing/2014/main" id="{DE943889-1AC4-4D0C-9EE9-4EB6E412D186}"/>
+                <a16:creationId xmlns:a16="http://schemas.microsoft.com/office/drawing/2014/main" id="{1506A44B-A23C-4D6C-B848-345831DA811D}"/>
               </a:ext>
             </a:extLst>
           </p:cNvPr>
@@ -2457,7 +2670,7 @@
           <p:cNvPr id="2" name="Title 1">
             <a:extLst xmlns:a="http://schemas.openxmlformats.org/drawingml/2006/main">
               <a:ext uri="{FF2B5EF4-FFF2-40B4-BE49-F238E27FC236}">
-                <a16:creationId xmlns:a16="http://schemas.microsoft.com/office/drawing/2014/main" id="{CB92B613-52C9-4C14-B4ED-967B1BC16EB4}"/>
+                <a16:creationId xmlns:a16="http://schemas.microsoft.com/office/drawing/2014/main" id="{8CD1AED5-E094-4E81-AADF-A7E2039231D9}"/>
               </a:ext>
             </a:extLst>
           </p:cNvPr>
@@ -2484,7 +2697,7 @@
           <p:cNvPr id="3" name="Vertical Text Placeholder 2">
             <a:extLst xmlns:a="http://schemas.openxmlformats.org/drawingml/2006/main">
               <a:ext uri="{FF2B5EF4-FFF2-40B4-BE49-F238E27FC236}">
-                <a16:creationId xmlns:a16="http://schemas.microsoft.com/office/drawing/2014/main" id="{E32D82D3-400F-4496-92A7-B27508D87A5E}"/>
+                <a16:creationId xmlns:a16="http://schemas.microsoft.com/office/drawing/2014/main" id="{284E7AD6-010F-4D02-A476-B4B425201D7A}"/>
               </a:ext>
             </a:extLst>
           </p:cNvPr>
@@ -2546,7 +2759,7 @@
           <p:cNvPr id="4" name="Date Placeholder 3">
             <a:extLst xmlns:a="http://schemas.openxmlformats.org/drawingml/2006/main">
               <a:ext uri="{FF2B5EF4-FFF2-40B4-BE49-F238E27FC236}">
-                <a16:creationId xmlns:a16="http://schemas.microsoft.com/office/drawing/2014/main" id="{92F371EA-7676-420F-97B6-395EB6CCFC31}"/>
+                <a16:creationId xmlns:a16="http://schemas.microsoft.com/office/drawing/2014/main" id="{1C2EB3E0-95FA-4AC9-AC8F-E79E01BE38B3}"/>
               </a:ext>
             </a:extLst>
           </p:cNvPr>
@@ -2574,7 +2787,7 @@
           <p:cNvPr id="5" name="Footer Placeholder 4">
             <a:extLst xmlns:a="http://schemas.openxmlformats.org/drawingml/2006/main">
               <a:ext uri="{FF2B5EF4-FFF2-40B4-BE49-F238E27FC236}">
-                <a16:creationId xmlns:a16="http://schemas.microsoft.com/office/drawing/2014/main" id="{8DBE66BA-C9AB-4FAA-8089-7229698421FD}"/>
+                <a16:creationId xmlns:a16="http://schemas.microsoft.com/office/drawing/2014/main" id="{60A2F0CA-6DEC-4587-AA6E-2CA77834564B}"/>
               </a:ext>
             </a:extLst>
           </p:cNvPr>
@@ -2599,7 +2812,7 @@
           <p:cNvPr id="6" name="Slide Number Placeholder 5">
             <a:extLst xmlns:a="http://schemas.openxmlformats.org/drawingml/2006/main">
               <a:ext uri="{FF2B5EF4-FFF2-40B4-BE49-F238E27FC236}">
-                <a16:creationId xmlns:a16="http://schemas.microsoft.com/office/drawing/2014/main" id="{A97E6553-AEAD-408D-B17F-B51EA478AC4F}"/>
+                <a16:creationId xmlns:a16="http://schemas.microsoft.com/office/drawing/2014/main" id="{D50EA845-3471-4F4A-A6B8-383B7F222D5E}"/>
               </a:ext>
             </a:extLst>
           </p:cNvPr>
@@ -2644,7 +2857,7 @@
           <p:cNvPr id="2" name="Vertical Title 1">
             <a:extLst xmlns:a="http://schemas.openxmlformats.org/drawingml/2006/main">
               <a:ext uri="{FF2B5EF4-FFF2-40B4-BE49-F238E27FC236}">
-                <a16:creationId xmlns:a16="http://schemas.microsoft.com/office/drawing/2014/main" id="{2376B1E8-8FD8-4F17-A452-F6FFD93E20C2}"/>
+                <a16:creationId xmlns:a16="http://schemas.microsoft.com/office/drawing/2014/main" id="{D335E738-7167-432C-A184-240A547D3005}"/>
               </a:ext>
             </a:extLst>
           </p:cNvPr>
@@ -2676,7 +2889,7 @@
           <p:cNvPr id="3" name="Vertical Text Placeholder 2">
             <a:extLst xmlns:a="http://schemas.openxmlformats.org/drawingml/2006/main">
               <a:ext uri="{FF2B5EF4-FFF2-40B4-BE49-F238E27FC236}">
-                <a16:creationId xmlns:a16="http://schemas.microsoft.com/office/drawing/2014/main" id="{4E9F0A38-6119-4CE9-8DA7-1EB3556B90F9}"/>
+                <a16:creationId xmlns:a16="http://schemas.microsoft.com/office/drawing/2014/main" id="{CEAD253F-D818-43AE-9796-512A4E255B46}"/>
               </a:ext>
             </a:extLst>
           </p:cNvPr>
@@ -2743,7 +2956,7 @@
           <p:cNvPr id="4" name="Date Placeholder 3">
             <a:extLst xmlns:a="http://schemas.openxmlformats.org/drawingml/2006/main">
               <a:ext uri="{FF2B5EF4-FFF2-40B4-BE49-F238E27FC236}">
-                <a16:creationId xmlns:a16="http://schemas.microsoft.com/office/drawing/2014/main" id="{3982465C-A506-417D-B25C-0FB4C6B3C03F}"/>
+                <a16:creationId xmlns:a16="http://schemas.microsoft.com/office/drawing/2014/main" id="{8062E854-6161-4D39-ABB9-A29DCABF6FA3}"/>
               </a:ext>
             </a:extLst>
           </p:cNvPr>
@@ -2771,7 +2984,7 @@
           <p:cNvPr id="5" name="Footer Placeholder 4">
             <a:extLst xmlns:a="http://schemas.openxmlformats.org/drawingml/2006/main">
               <a:ext uri="{FF2B5EF4-FFF2-40B4-BE49-F238E27FC236}">
-                <a16:creationId xmlns:a16="http://schemas.microsoft.com/office/drawing/2014/main" id="{08FAD0C6-1754-4990-8AAC-2F4A65C8C707}"/>
+                <a16:creationId xmlns:a16="http://schemas.microsoft.com/office/drawing/2014/main" id="{F6F8836A-F14F-4A69-AD70-11EBBA0A74AD}"/>
               </a:ext>
             </a:extLst>
           </p:cNvPr>
@@ -2796,7 +3009,7 @@
           <p:cNvPr id="6" name="Slide Number Placeholder 5">
             <a:extLst xmlns:a="http://schemas.openxmlformats.org/drawingml/2006/main">
               <a:ext uri="{FF2B5EF4-FFF2-40B4-BE49-F238E27FC236}">
-                <a16:creationId xmlns:a16="http://schemas.microsoft.com/office/drawing/2014/main" id="{74CDE0D7-C9D8-49BB-AD98-0056695B2023}"/>
+                <a16:creationId xmlns:a16="http://schemas.microsoft.com/office/drawing/2014/main" id="{B2E53466-3440-46F6-BB0A-DDCB30D8D40C}"/>
               </a:ext>
             </a:extLst>
           </p:cNvPr>
@@ -2841,7 +3054,7 @@
           <p:cNvPr id="3" name="Content Placeholder 2">
             <a:extLst xmlns:a="http://schemas.openxmlformats.org/drawingml/2006/main">
               <a:ext uri="{FF2B5EF4-FFF2-40B4-BE49-F238E27FC236}">
-                <a16:creationId xmlns:a16="http://schemas.microsoft.com/office/drawing/2014/main" id="{7F82553E-233C-4555-A6AC-8BF0D00BBEFF}"/>
+                <a16:creationId xmlns:a16="http://schemas.microsoft.com/office/drawing/2014/main" id="{F9F982B7-E689-4A5C-89F6-7AC254215BEA}"/>
               </a:ext>
             </a:extLst>
           </p:cNvPr>
@@ -2904,7 +3117,7 @@
           <p:cNvPr id="4" name="Date Placeholder 3">
             <a:extLst xmlns:a="http://schemas.openxmlformats.org/drawingml/2006/main">
               <a:ext uri="{FF2B5EF4-FFF2-40B4-BE49-F238E27FC236}">
-                <a16:creationId xmlns:a16="http://schemas.microsoft.com/office/drawing/2014/main" id="{F1833BC8-DAD8-463C-8FB2-42AAA315ED58}"/>
+                <a16:creationId xmlns:a16="http://schemas.microsoft.com/office/drawing/2014/main" id="{0BB144D6-1C4A-440D-AF78-793DF8FDC9BB}"/>
               </a:ext>
             </a:extLst>
           </p:cNvPr>
@@ -2932,7 +3145,7 @@
           <p:cNvPr id="5" name="Footer Placeholder 4">
             <a:extLst xmlns:a="http://schemas.openxmlformats.org/drawingml/2006/main">
               <a:ext uri="{FF2B5EF4-FFF2-40B4-BE49-F238E27FC236}">
-                <a16:creationId xmlns:a16="http://schemas.microsoft.com/office/drawing/2014/main" id="{2021D7EA-2E7D-4AEA-AE0F-76FD50D78704}"/>
+                <a16:creationId xmlns:a16="http://schemas.microsoft.com/office/drawing/2014/main" id="{58C38383-1ED0-4206-9822-0DAEE72C0A19}"/>
               </a:ext>
             </a:extLst>
           </p:cNvPr>
@@ -2957,7 +3170,7 @@
           <p:cNvPr id="6" name="Slide Number Placeholder 5">
             <a:extLst xmlns:a="http://schemas.openxmlformats.org/drawingml/2006/main">
               <a:ext uri="{FF2B5EF4-FFF2-40B4-BE49-F238E27FC236}">
-                <a16:creationId xmlns:a16="http://schemas.microsoft.com/office/drawing/2014/main" id="{11D706A4-706B-411C-83A7-084FADF01288}"/>
+                <a16:creationId xmlns:a16="http://schemas.microsoft.com/office/drawing/2014/main" id="{4B772E94-D351-455E-BA10-08172E64A2E9}"/>
               </a:ext>
             </a:extLst>
           </p:cNvPr>
@@ -3045,7 +3258,7 @@
           <p:cNvPr id="2" name="Title 1">
             <a:extLst xmlns:a="http://schemas.openxmlformats.org/drawingml/2006/main">
               <a:ext uri="{FF2B5EF4-FFF2-40B4-BE49-F238E27FC236}">
-                <a16:creationId xmlns:a16="http://schemas.microsoft.com/office/drawing/2014/main" id="{944B4385-2D0E-4503-9903-ACDF8EBE8766}"/>
+                <a16:creationId xmlns:a16="http://schemas.microsoft.com/office/drawing/2014/main" id="{D5191EA2-2201-464D-AC6E-07B120495785}"/>
               </a:ext>
             </a:extLst>
           </p:cNvPr>
@@ -3083,7 +3296,7 @@
           <p:cNvPr id="3" name="Text Placeholder 2">
             <a:extLst xmlns:a="http://schemas.openxmlformats.org/drawingml/2006/main">
               <a:ext uri="{FF2B5EF4-FFF2-40B4-BE49-F238E27FC236}">
-                <a16:creationId xmlns:a16="http://schemas.microsoft.com/office/drawing/2014/main" id="{ACDBC546-BB35-4D73-BD51-12346DBE3C6D}"/>
+                <a16:creationId xmlns:a16="http://schemas.microsoft.com/office/drawing/2014/main" id="{D8B6E60E-AF0D-462B-B347-137723BC8719}"/>
               </a:ext>
             </a:extLst>
           </p:cNvPr>
@@ -3209,7 +3422,7 @@
           <p:cNvPr id="4" name="Date Placeholder 3">
             <a:extLst xmlns:a="http://schemas.openxmlformats.org/drawingml/2006/main">
               <a:ext uri="{FF2B5EF4-FFF2-40B4-BE49-F238E27FC236}">
-                <a16:creationId xmlns:a16="http://schemas.microsoft.com/office/drawing/2014/main" id="{54C41945-4EC3-46EE-89A9-3D57901DD842}"/>
+                <a16:creationId xmlns:a16="http://schemas.microsoft.com/office/drawing/2014/main" id="{0ED389EF-9117-4BC5-86CD-A73AF26CA022}"/>
               </a:ext>
             </a:extLst>
           </p:cNvPr>
@@ -3237,7 +3450,7 @@
           <p:cNvPr id="5" name="Footer Placeholder 4">
             <a:extLst xmlns:a="http://schemas.openxmlformats.org/drawingml/2006/main">
               <a:ext uri="{FF2B5EF4-FFF2-40B4-BE49-F238E27FC236}">
-                <a16:creationId xmlns:a16="http://schemas.microsoft.com/office/drawing/2014/main" id="{9C7D1E93-EAC3-497B-9F75-FEF33982D3A6}"/>
+                <a16:creationId xmlns:a16="http://schemas.microsoft.com/office/drawing/2014/main" id="{DFB78004-D87B-4DEE-AE3E-099F81A354AA}"/>
               </a:ext>
             </a:extLst>
           </p:cNvPr>
@@ -3262,7 +3475,7 @@
           <p:cNvPr id="6" name="Slide Number Placeholder 5">
             <a:extLst xmlns:a="http://schemas.openxmlformats.org/drawingml/2006/main">
               <a:ext uri="{FF2B5EF4-FFF2-40B4-BE49-F238E27FC236}">
-                <a16:creationId xmlns:a16="http://schemas.microsoft.com/office/drawing/2014/main" id="{61D70DE9-C5EA-4867-8AAC-EDC896DBFF30}"/>
+                <a16:creationId xmlns:a16="http://schemas.microsoft.com/office/drawing/2014/main" id="{EF9CFECE-3415-4FD0-98CE-3F107163BA67}"/>
               </a:ext>
             </a:extLst>
           </p:cNvPr>
@@ -3307,7 +3520,7 @@
           <p:cNvPr id="2" name="Title 1">
             <a:extLst xmlns:a="http://schemas.openxmlformats.org/drawingml/2006/main">
               <a:ext uri="{FF2B5EF4-FFF2-40B4-BE49-F238E27FC236}">
-                <a16:creationId xmlns:a16="http://schemas.microsoft.com/office/drawing/2014/main" id="{4336C67B-43CE-4BF7-A1DC-B91F136393E1}"/>
+                <a16:creationId xmlns:a16="http://schemas.microsoft.com/office/drawing/2014/main" id="{EE7817BD-BB7E-4EA4-B8B7-D1EA319C9B83}"/>
               </a:ext>
             </a:extLst>
           </p:cNvPr>
@@ -3334,7 +3547,7 @@
           <p:cNvPr id="3" name="Content Placeholder 2">
             <a:extLst xmlns:a="http://schemas.openxmlformats.org/drawingml/2006/main">
               <a:ext uri="{FF2B5EF4-FFF2-40B4-BE49-F238E27FC236}">
-                <a16:creationId xmlns:a16="http://schemas.microsoft.com/office/drawing/2014/main" id="{40BD655D-852F-4C97-97EA-7C56FC0A1AA6}"/>
+                <a16:creationId xmlns:a16="http://schemas.microsoft.com/office/drawing/2014/main" id="{75B5CFA1-8FE1-4D52-93AB-AFB6A8CE4042}"/>
               </a:ext>
             </a:extLst>
           </p:cNvPr>
@@ -3439,7 +3652,7 @@
           <p:cNvPr id="4" name="Content Placeholder 3">
             <a:extLst xmlns:a="http://schemas.openxmlformats.org/drawingml/2006/main">
               <a:ext uri="{FF2B5EF4-FFF2-40B4-BE49-F238E27FC236}">
-                <a16:creationId xmlns:a16="http://schemas.microsoft.com/office/drawing/2014/main" id="{6ECD376D-446C-4123-BEF5-61C305395D3A}"/>
+                <a16:creationId xmlns:a16="http://schemas.microsoft.com/office/drawing/2014/main" id="{96DA7D4B-B770-4ED2-821D-3F3EC8482522}"/>
               </a:ext>
             </a:extLst>
           </p:cNvPr>
@@ -3544,7 +3757,7 @@
           <p:cNvPr id="5" name="Date Placeholder 4">
             <a:extLst xmlns:a="http://schemas.openxmlformats.org/drawingml/2006/main">
               <a:ext uri="{FF2B5EF4-FFF2-40B4-BE49-F238E27FC236}">
-                <a16:creationId xmlns:a16="http://schemas.microsoft.com/office/drawing/2014/main" id="{0EC5971C-21CF-4105-A7AF-C862621E409A}"/>
+                <a16:creationId xmlns:a16="http://schemas.microsoft.com/office/drawing/2014/main" id="{D7DC18B4-866E-419C-BF22-1E908AF513FD}"/>
               </a:ext>
             </a:extLst>
           </p:cNvPr>
@@ -3572,7 +3785,7 @@
           <p:cNvPr id="6" name="Footer Placeholder 5">
             <a:extLst xmlns:a="http://schemas.openxmlformats.org/drawingml/2006/main">
               <a:ext uri="{FF2B5EF4-FFF2-40B4-BE49-F238E27FC236}">
-                <a16:creationId xmlns:a16="http://schemas.microsoft.com/office/drawing/2014/main" id="{DF32E8B9-D266-4367-A18B-E7EA1FF622F1}"/>
+                <a16:creationId xmlns:a16="http://schemas.microsoft.com/office/drawing/2014/main" id="{92CD77FA-E5F4-438E-919A-80341A6F2941}"/>
               </a:ext>
             </a:extLst>
           </p:cNvPr>
@@ -3597,7 +3810,7 @@
           <p:cNvPr id="7" name="Slide Number Placeholder 6">
             <a:extLst xmlns:a="http://schemas.openxmlformats.org/drawingml/2006/main">
               <a:ext uri="{FF2B5EF4-FFF2-40B4-BE49-F238E27FC236}">
-                <a16:creationId xmlns:a16="http://schemas.microsoft.com/office/drawing/2014/main" id="{88AB2E80-B035-4F11-A852-7671959E2B6A}"/>
+                <a16:creationId xmlns:a16="http://schemas.microsoft.com/office/drawing/2014/main" id="{4AC91DE2-A6DF-4A61-9132-8248D87870E7}"/>
               </a:ext>
             </a:extLst>
           </p:cNvPr>
@@ -3642,7 +3855,7 @@
           <p:cNvPr id="2" name="Title 1">
             <a:extLst xmlns:a="http://schemas.openxmlformats.org/drawingml/2006/main">
               <a:ext uri="{FF2B5EF4-FFF2-40B4-BE49-F238E27FC236}">
-                <a16:creationId xmlns:a16="http://schemas.microsoft.com/office/drawing/2014/main" id="{08251649-16BA-40BD-93D6-D30DF0BBE776}"/>
+                <a16:creationId xmlns:a16="http://schemas.microsoft.com/office/drawing/2014/main" id="{211579F4-F7CE-4591-AD4F-8C363048BC6F}"/>
               </a:ext>
             </a:extLst>
           </p:cNvPr>
@@ -3674,7 +3887,7 @@
           <p:cNvPr id="3" name="Text Placeholder 2">
             <a:extLst xmlns:a="http://schemas.openxmlformats.org/drawingml/2006/main">
               <a:ext uri="{FF2B5EF4-FFF2-40B4-BE49-F238E27FC236}">
-                <a16:creationId xmlns:a16="http://schemas.microsoft.com/office/drawing/2014/main" id="{00D7E939-78F4-47CC-8810-68BE330C145C}"/>
+                <a16:creationId xmlns:a16="http://schemas.microsoft.com/office/drawing/2014/main" id="{6435B9D3-D3C2-4402-9537-F57B1B67D699}"/>
               </a:ext>
             </a:extLst>
           </p:cNvPr>
@@ -3746,7 +3959,7 @@
           <p:cNvPr id="4" name="Content Placeholder 3">
             <a:extLst xmlns:a="http://schemas.openxmlformats.org/drawingml/2006/main">
               <a:ext uri="{FF2B5EF4-FFF2-40B4-BE49-F238E27FC236}">
-                <a16:creationId xmlns:a16="http://schemas.microsoft.com/office/drawing/2014/main" id="{953CA6FA-9A6E-4729-8A42-0B45AF1DE162}"/>
+                <a16:creationId xmlns:a16="http://schemas.microsoft.com/office/drawing/2014/main" id="{092311C6-E442-4183-A30D-B03B160524CA}"/>
               </a:ext>
             </a:extLst>
           </p:cNvPr>
@@ -3850,7 +4063,7 @@
           <p:cNvPr id="5" name="Text Placeholder 4">
             <a:extLst xmlns:a="http://schemas.openxmlformats.org/drawingml/2006/main">
               <a:ext uri="{FF2B5EF4-FFF2-40B4-BE49-F238E27FC236}">
-                <a16:creationId xmlns:a16="http://schemas.microsoft.com/office/drawing/2014/main" id="{149487C5-C586-46B1-AC92-540B98A5810B}"/>
+                <a16:creationId xmlns:a16="http://schemas.microsoft.com/office/drawing/2014/main" id="{78F157DE-A48E-4D30-AEBE-E1A3A0D34862}"/>
               </a:ext>
             </a:extLst>
           </p:cNvPr>
@@ -3922,7 +4135,7 @@
           <p:cNvPr id="6" name="Content Placeholder 5">
             <a:extLst xmlns:a="http://schemas.openxmlformats.org/drawingml/2006/main">
               <a:ext uri="{FF2B5EF4-FFF2-40B4-BE49-F238E27FC236}">
-                <a16:creationId xmlns:a16="http://schemas.microsoft.com/office/drawing/2014/main" id="{A2A8CCA2-706C-4DC9-94D8-F8EF0248D6C1}"/>
+                <a16:creationId xmlns:a16="http://schemas.microsoft.com/office/drawing/2014/main" id="{DD434C91-BC12-47F5-9AD5-E6C6833B9E13}"/>
               </a:ext>
             </a:extLst>
           </p:cNvPr>
@@ -4026,7 +4239,7 @@
           <p:cNvPr id="7" name="Date Placeholder 6">
             <a:extLst xmlns:a="http://schemas.openxmlformats.org/drawingml/2006/main">
               <a:ext uri="{FF2B5EF4-FFF2-40B4-BE49-F238E27FC236}">
-                <a16:creationId xmlns:a16="http://schemas.microsoft.com/office/drawing/2014/main" id="{4C1ACC57-FC11-4683-BF5B-C4C1ADB5AC9D}"/>
+                <a16:creationId xmlns:a16="http://schemas.microsoft.com/office/drawing/2014/main" id="{2CC506CE-03B7-4A35-B409-4071FAD6FA35}"/>
               </a:ext>
             </a:extLst>
           </p:cNvPr>
@@ -4054,7 +4267,7 @@
           <p:cNvPr id="8" name="Footer Placeholder 7">
             <a:extLst xmlns:a="http://schemas.openxmlformats.org/drawingml/2006/main">
               <a:ext uri="{FF2B5EF4-FFF2-40B4-BE49-F238E27FC236}">
-                <a16:creationId xmlns:a16="http://schemas.microsoft.com/office/drawing/2014/main" id="{4153BA02-D28C-41E1-84E3-7A006DC56713}"/>
+                <a16:creationId xmlns:a16="http://schemas.microsoft.com/office/drawing/2014/main" id="{6E59B539-BFE2-4EC5-B6D5-BAF4667B5436}"/>
               </a:ext>
             </a:extLst>
           </p:cNvPr>
@@ -4079,7 +4292,7 @@
           <p:cNvPr id="9" name="Slide Number Placeholder 8">
             <a:extLst xmlns:a="http://schemas.openxmlformats.org/drawingml/2006/main">
               <a:ext uri="{FF2B5EF4-FFF2-40B4-BE49-F238E27FC236}">
-                <a16:creationId xmlns:a16="http://schemas.microsoft.com/office/drawing/2014/main" id="{52A2C5FE-BC33-4ECC-ADA0-D20A654116A3}"/>
+                <a16:creationId xmlns:a16="http://schemas.microsoft.com/office/drawing/2014/main" id="{479FD783-DC44-4D18-BDEB-FA59B6D75826}"/>
               </a:ext>
             </a:extLst>
           </p:cNvPr>
@@ -4124,7 +4337,7 @@
           <p:cNvPr id="2" name="Title 1">
             <a:extLst xmlns:a="http://schemas.openxmlformats.org/drawingml/2006/main">
               <a:ext uri="{FF2B5EF4-FFF2-40B4-BE49-F238E27FC236}">
-                <a16:creationId xmlns:a16="http://schemas.microsoft.com/office/drawing/2014/main" id="{EB071766-DE2C-4B91-ADF0-8862BB3A17B0}"/>
+                <a16:creationId xmlns:a16="http://schemas.microsoft.com/office/drawing/2014/main" id="{7B37E436-4460-4B36-AD1F-369CC53C19D2}"/>
               </a:ext>
             </a:extLst>
           </p:cNvPr>
@@ -4151,7 +4364,7 @@
           <p:cNvPr id="3" name="Date Placeholder 2">
             <a:extLst xmlns:a="http://schemas.openxmlformats.org/drawingml/2006/main">
               <a:ext uri="{FF2B5EF4-FFF2-40B4-BE49-F238E27FC236}">
-                <a16:creationId xmlns:a16="http://schemas.microsoft.com/office/drawing/2014/main" id="{B011F2FB-AE95-4F72-9BAC-F4E00850B801}"/>
+                <a16:creationId xmlns:a16="http://schemas.microsoft.com/office/drawing/2014/main" id="{267536FA-E9BC-431D-8FD9-BA5B242E9B92}"/>
               </a:ext>
             </a:extLst>
           </p:cNvPr>
@@ -4179,7 +4392,7 @@
           <p:cNvPr id="4" name="Footer Placeholder 3">
             <a:extLst xmlns:a="http://schemas.openxmlformats.org/drawingml/2006/main">
               <a:ext uri="{FF2B5EF4-FFF2-40B4-BE49-F238E27FC236}">
-                <a16:creationId xmlns:a16="http://schemas.microsoft.com/office/drawing/2014/main" id="{B49E6CB2-FBFC-489A-8ABC-2028D74E2DFE}"/>
+                <a16:creationId xmlns:a16="http://schemas.microsoft.com/office/drawing/2014/main" id="{B64777E3-2B1E-4142-AEB7-62ADDC7FBE2D}"/>
               </a:ext>
             </a:extLst>
           </p:cNvPr>
@@ -4204,7 +4417,7 @@
           <p:cNvPr id="5" name="Slide Number Placeholder 4">
             <a:extLst xmlns:a="http://schemas.openxmlformats.org/drawingml/2006/main">
               <a:ext uri="{FF2B5EF4-FFF2-40B4-BE49-F238E27FC236}">
-                <a16:creationId xmlns:a16="http://schemas.microsoft.com/office/drawing/2014/main" id="{B1120612-F34B-4587-82BF-3F5D81687905}"/>
+                <a16:creationId xmlns:a16="http://schemas.microsoft.com/office/drawing/2014/main" id="{22DB1F15-E3E4-4CA6-89B1-94C958120A60}"/>
               </a:ext>
             </a:extLst>
           </p:cNvPr>
@@ -4249,7 +4462,7 @@
           <p:cNvPr id="2" name="Date Placeholder 1">
             <a:extLst xmlns:a="http://schemas.openxmlformats.org/drawingml/2006/main">
               <a:ext uri="{FF2B5EF4-FFF2-40B4-BE49-F238E27FC236}">
-                <a16:creationId xmlns:a16="http://schemas.microsoft.com/office/drawing/2014/main" id="{119E376F-CAC5-49B9-8DF2-A9EA996807FC}"/>
+                <a16:creationId xmlns:a16="http://schemas.microsoft.com/office/drawing/2014/main" id="{FA57C7E1-8A38-4CA4-AF54-E9A8DEFF21E7}"/>
               </a:ext>
             </a:extLst>
           </p:cNvPr>
@@ -4277,7 +4490,7 @@
           <p:cNvPr id="3" name="Footer Placeholder 2">
             <a:extLst xmlns:a="http://schemas.openxmlformats.org/drawingml/2006/main">
               <a:ext uri="{FF2B5EF4-FFF2-40B4-BE49-F238E27FC236}">
-                <a16:creationId xmlns:a16="http://schemas.microsoft.com/office/drawing/2014/main" id="{A13804A7-5EC7-4C9F-A636-C5DC42BF16E7}"/>
+                <a16:creationId xmlns:a16="http://schemas.microsoft.com/office/drawing/2014/main" id="{EF5988D5-9914-4BF6-944D-A6B59E15748B}"/>
               </a:ext>
             </a:extLst>
           </p:cNvPr>
@@ -4302,7 +4515,7 @@
           <p:cNvPr id="4" name="Slide Number Placeholder 3">
             <a:extLst xmlns:a="http://schemas.openxmlformats.org/drawingml/2006/main">
               <a:ext uri="{FF2B5EF4-FFF2-40B4-BE49-F238E27FC236}">
-                <a16:creationId xmlns:a16="http://schemas.microsoft.com/office/drawing/2014/main" id="{6272E421-3F1D-409E-B78F-F32723049157}"/>
+                <a16:creationId xmlns:a16="http://schemas.microsoft.com/office/drawing/2014/main" id="{22025B7F-F11F-4ECF-97B2-CC58763D8B52}"/>
               </a:ext>
             </a:extLst>
           </p:cNvPr>
@@ -4347,7 +4560,7 @@
           <p:cNvPr id="2" name="Title 1">
             <a:extLst xmlns:a="http://schemas.openxmlformats.org/drawingml/2006/main">
               <a:ext uri="{FF2B5EF4-FFF2-40B4-BE49-F238E27FC236}">
-                <a16:creationId xmlns:a16="http://schemas.microsoft.com/office/drawing/2014/main" id="{4D3CF734-7429-4B63-B3E3-FC4239A6D041}"/>
+                <a16:creationId xmlns:a16="http://schemas.microsoft.com/office/drawing/2014/main" id="{963D16DE-F083-45DC-8E95-17374227F44E}"/>
               </a:ext>
             </a:extLst>
           </p:cNvPr>
@@ -4384,7 +4597,7 @@
           <p:cNvPr id="3" name="Content Placeholder 2">
             <a:extLst xmlns:a="http://schemas.openxmlformats.org/drawingml/2006/main">
               <a:ext uri="{FF2B5EF4-FFF2-40B4-BE49-F238E27FC236}">
-                <a16:creationId xmlns:a16="http://schemas.microsoft.com/office/drawing/2014/main" id="{84C40E00-7923-474E-992C-050C7519A6E3}"/>
+                <a16:creationId xmlns:a16="http://schemas.microsoft.com/office/drawing/2014/main" id="{83F8AA5B-45DF-4D16-9D9A-991C40B67EC0}"/>
               </a:ext>
             </a:extLst>
           </p:cNvPr>
@@ -4488,7 +4701,7 @@
           <p:cNvPr id="4" name="Text Placeholder 3">
             <a:extLst xmlns:a="http://schemas.openxmlformats.org/drawingml/2006/main">
               <a:ext uri="{FF2B5EF4-FFF2-40B4-BE49-F238E27FC236}">
-                <a16:creationId xmlns:a16="http://schemas.microsoft.com/office/drawing/2014/main" id="{D16EEA3D-E484-4D91-ACDC-94F6DC9581C3}"/>
+                <a16:creationId xmlns:a16="http://schemas.microsoft.com/office/drawing/2014/main" id="{A86181F3-473B-47C2-9BF5-9B48CB931BDE}"/>
               </a:ext>
             </a:extLst>
           </p:cNvPr>
@@ -4560,7 +4773,7 @@
           <p:cNvPr id="5" name="Date Placeholder 4">
             <a:extLst xmlns:a="http://schemas.openxmlformats.org/drawingml/2006/main">
               <a:ext uri="{FF2B5EF4-FFF2-40B4-BE49-F238E27FC236}">
-                <a16:creationId xmlns:a16="http://schemas.microsoft.com/office/drawing/2014/main" id="{E367F4BD-9D08-4E82-8752-A6E85C7DCFD7}"/>
+                <a16:creationId xmlns:a16="http://schemas.microsoft.com/office/drawing/2014/main" id="{F2E035F8-126D-409B-9E3A-B21EC4968864}"/>
               </a:ext>
             </a:extLst>
           </p:cNvPr>
@@ -4588,7 +4801,7 @@
           <p:cNvPr id="6" name="Footer Placeholder 5">
             <a:extLst xmlns:a="http://schemas.openxmlformats.org/drawingml/2006/main">
               <a:ext uri="{FF2B5EF4-FFF2-40B4-BE49-F238E27FC236}">
-                <a16:creationId xmlns:a16="http://schemas.microsoft.com/office/drawing/2014/main" id="{064717D7-EA46-4FC9-9275-2940EBC5A100}"/>
+                <a16:creationId xmlns:a16="http://schemas.microsoft.com/office/drawing/2014/main" id="{F376ACDA-AEF1-4E70-BF6D-A260151BD247}"/>
               </a:ext>
             </a:extLst>
           </p:cNvPr>
@@ -4613,7 +4826,7 @@
           <p:cNvPr id="7" name="Slide Number Placeholder 6">
             <a:extLst xmlns:a="http://schemas.openxmlformats.org/drawingml/2006/main">
               <a:ext uri="{FF2B5EF4-FFF2-40B4-BE49-F238E27FC236}">
-                <a16:creationId xmlns:a16="http://schemas.microsoft.com/office/drawing/2014/main" id="{8A987C65-9DA5-443C-93F0-2EC56F7BBA86}"/>
+                <a16:creationId xmlns:a16="http://schemas.microsoft.com/office/drawing/2014/main" id="{0C48F56C-0FA0-4745-B919-204A7A724404}"/>
               </a:ext>
             </a:extLst>
           </p:cNvPr>
@@ -4658,7 +4871,7 @@
           <p:cNvPr id="2" name="Title 1">
             <a:extLst xmlns:a="http://schemas.openxmlformats.org/drawingml/2006/main">
               <a:ext uri="{FF2B5EF4-FFF2-40B4-BE49-F238E27FC236}">
-                <a16:creationId xmlns:a16="http://schemas.microsoft.com/office/drawing/2014/main" id="{3C55F8E1-B05C-4334-888A-40B813206A3E}"/>
+                <a16:creationId xmlns:a16="http://schemas.microsoft.com/office/drawing/2014/main" id="{8942009C-B1BE-4BBB-A768-DF9ACBFA850D}"/>
               </a:ext>
             </a:extLst>
           </p:cNvPr>
@@ -4695,7 +4908,7 @@
           <p:cNvPr id="3" name="Picture Placeholder 2">
             <a:extLst xmlns:a="http://schemas.openxmlformats.org/drawingml/2006/main">
               <a:ext uri="{FF2B5EF4-FFF2-40B4-BE49-F238E27FC236}">
-                <a16:creationId xmlns:a16="http://schemas.microsoft.com/office/drawing/2014/main" id="{74DF1822-2C0A-4EE4-8ABE-7DEE962076E0}"/>
+                <a16:creationId xmlns:a16="http://schemas.microsoft.com/office/drawing/2014/main" id="{41E26C36-C879-4831-A53E-9FDEB485F07A}"/>
               </a:ext>
             </a:extLst>
           </p:cNvPr>
@@ -4764,7 +4977,7 @@
           <p:cNvPr id="4" name="Text Placeholder 3">
             <a:extLst xmlns:a="http://schemas.openxmlformats.org/drawingml/2006/main">
               <a:ext uri="{FF2B5EF4-FFF2-40B4-BE49-F238E27FC236}">
-                <a16:creationId xmlns:a16="http://schemas.microsoft.com/office/drawing/2014/main" id="{FFD9C5AA-5637-4514-A48E-EF9BB96379F1}"/>
+                <a16:creationId xmlns:a16="http://schemas.microsoft.com/office/drawing/2014/main" id="{084BA03B-B586-4657-8ECD-38079487DA1F}"/>
               </a:ext>
             </a:extLst>
           </p:cNvPr>
@@ -4836,7 +5049,7 @@
           <p:cNvPr id="5" name="Date Placeholder 4">
             <a:extLst xmlns:a="http://schemas.openxmlformats.org/drawingml/2006/main">
               <a:ext uri="{FF2B5EF4-FFF2-40B4-BE49-F238E27FC236}">
-                <a16:creationId xmlns:a16="http://schemas.microsoft.com/office/drawing/2014/main" id="{F1088EA7-B3D6-4546-8824-CB5BFB65237D}"/>
+                <a16:creationId xmlns:a16="http://schemas.microsoft.com/office/drawing/2014/main" id="{758E737D-91F2-47B1-A890-4AF3DB9BA0C2}"/>
               </a:ext>
             </a:extLst>
           </p:cNvPr>
@@ -4864,7 +5077,7 @@
           <p:cNvPr id="6" name="Footer Placeholder 5">
             <a:extLst xmlns:a="http://schemas.openxmlformats.org/drawingml/2006/main">
               <a:ext uri="{FF2B5EF4-FFF2-40B4-BE49-F238E27FC236}">
-                <a16:creationId xmlns:a16="http://schemas.microsoft.com/office/drawing/2014/main" id="{5F14139E-0501-4938-A06B-FCA404293FA2}"/>
+                <a16:creationId xmlns:a16="http://schemas.microsoft.com/office/drawing/2014/main" id="{89BDD1D3-398F-40B1-889C-21E58CCA8A77}"/>
               </a:ext>
             </a:extLst>
           </p:cNvPr>
@@ -4889,7 +5102,7 @@
           <p:cNvPr id="7" name="Slide Number Placeholder 6">
             <a:extLst xmlns:a="http://schemas.openxmlformats.org/drawingml/2006/main">
               <a:ext uri="{FF2B5EF4-FFF2-40B4-BE49-F238E27FC236}">
-                <a16:creationId xmlns:a16="http://schemas.microsoft.com/office/drawing/2014/main" id="{365AE261-4E17-4E91-A959-C344CBFFEA67}"/>
+                <a16:creationId xmlns:a16="http://schemas.microsoft.com/office/drawing/2014/main" id="{6B3B30FE-64F1-4398-95D3-88FEE2A7EFCB}"/>
               </a:ext>
             </a:extLst>
           </p:cNvPr>
@@ -4939,7 +5152,7 @@
           <p:cNvPr id="2" name="Title Placeholder 1">
             <a:extLst xmlns:a="http://schemas.openxmlformats.org/drawingml/2006/main">
               <a:ext uri="{FF2B5EF4-FFF2-40B4-BE49-F238E27FC236}">
-                <a16:creationId xmlns:a16="http://schemas.microsoft.com/office/drawing/2014/main" id="{03DB493E-FDA6-4A57-A074-0FB501DBA247}"/>
+                <a16:creationId xmlns:a16="http://schemas.microsoft.com/office/drawing/2014/main" id="{D227C0A6-3248-4E46-B50A-840227AD6845}"/>
               </a:ext>
             </a:extLst>
           </p:cNvPr>
@@ -4974,7 +5187,7 @@
           <p:cNvPr id="3" name="Text Placeholder 2">
             <a:extLst xmlns:a="http://schemas.openxmlformats.org/drawingml/2006/main">
               <a:ext uri="{FF2B5EF4-FFF2-40B4-BE49-F238E27FC236}">
-                <a16:creationId xmlns:a16="http://schemas.microsoft.com/office/drawing/2014/main" id="{2589715A-ECBA-4053-9E50-87D269E501CA}"/>
+                <a16:creationId xmlns:a16="http://schemas.microsoft.com/office/drawing/2014/main" id="{F483BED4-6236-4ED3-B51C-2688FD2B1C06}"/>
               </a:ext>
             </a:extLst>
           </p:cNvPr>
@@ -5047,7 +5260,7 @@
           <p:cNvPr id="4" name="Date Placeholder 3">
             <a:extLst xmlns:a="http://schemas.openxmlformats.org/drawingml/2006/main">
               <a:ext uri="{FF2B5EF4-FFF2-40B4-BE49-F238E27FC236}">
-                <a16:creationId xmlns:a16="http://schemas.microsoft.com/office/drawing/2014/main" id="{2D9B4007-0CF9-4A4F-BA7B-B255A6229CE9}"/>
+                <a16:creationId xmlns:a16="http://schemas.microsoft.com/office/drawing/2014/main" id="{41476842-A6BB-43B9-BF3E-FA2C9FE7420A}"/>
               </a:ext>
             </a:extLst>
           </p:cNvPr>
@@ -5094,7 +5307,7 @@
           <p:cNvPr id="5" name="Footer Placeholder 4">
             <a:extLst xmlns:a="http://schemas.openxmlformats.org/drawingml/2006/main">
               <a:ext uri="{FF2B5EF4-FFF2-40B4-BE49-F238E27FC236}">
-                <a16:creationId xmlns:a16="http://schemas.microsoft.com/office/drawing/2014/main" id="{8987B5A6-DC7E-491A-94E7-C99AE93C6F9B}"/>
+                <a16:creationId xmlns:a16="http://schemas.microsoft.com/office/drawing/2014/main" id="{613F812C-5954-45FD-A7E3-00EDD71F5067}"/>
               </a:ext>
             </a:extLst>
           </p:cNvPr>
@@ -5138,7 +5351,7 @@
           <p:cNvPr id="6" name="Slide Number Placeholder 5">
             <a:extLst xmlns:a="http://schemas.openxmlformats.org/drawingml/2006/main">
               <a:ext uri="{FF2B5EF4-FFF2-40B4-BE49-F238E27FC236}">
-                <a16:creationId xmlns:a16="http://schemas.microsoft.com/office/drawing/2014/main" id="{FDE4B6B6-09C2-430A-989D-15DF2565DADC}"/>
+                <a16:creationId xmlns:a16="http://schemas.microsoft.com/office/drawing/2014/main" id="{35B1317E-22D0-4D93-BC3F-E779FFAADCF0}"/>
               </a:ext>
             </a:extLst>
           </p:cNvPr>
@@ -5185,7 +5398,7 @@
           <p:cNvPr id="11" name="Picture 10">
             <a:extLst xmlns:a="http://schemas.openxmlformats.org/drawingml/2006/main">
               <a:ext uri="{FF2B5EF4-FFF2-40B4-BE49-F238E27FC236}">
-                <a16:creationId xmlns:a16="http://schemas.microsoft.com/office/drawing/2014/main" id="{68E68C72-C8BD-40EC-B631-B88D990A0862}"/>
+                <a16:creationId xmlns:a16="http://schemas.microsoft.com/office/drawing/2014/main" id="{5417D14B-0B0A-49E1-B513-D7DE9D736C2A}"/>
               </a:ext>
             </a:extLst>
           </p:cNvPr>
@@ -5195,7 +5408,7 @@
           <p:nvPr/>
         </p:nvPicPr>
         <p:blipFill>
-          <a:blip xmlns:r="http://schemas.openxmlformats.org/officeDocument/2006/relationships" xmlns:a="http://schemas.openxmlformats.org/drawingml/2006/main" r:embed="Rfb4311ce0428473a"/>
+          <a:blip xmlns:r="http://schemas.openxmlformats.org/officeDocument/2006/relationships" xmlns:a="http://schemas.openxmlformats.org/drawingml/2006/main" r:embed="R91f4e2bd2d054790"/>
           <a:stretch xmlns:a="http://schemas.openxmlformats.org/drawingml/2006/main">
             <a:fillRect l="0" t="0" r="0" b="0"/>
           </a:stretch>
@@ -5214,17 +5427,17 @@
   </p:cSld>
   <p:clrMap bg1="lt1" tx1="dk1" bg2="lt2" tx2="dk2" accent1="accent1" accent2="accent2" accent3="accent3" accent4="accent4" accent5="accent5" accent6="accent6" hlink="hlink" folHlink="folHlink"/>
   <p:sldLayoutIdLst>
-    <p:sldLayoutId xmlns:r="http://schemas.openxmlformats.org/officeDocument/2006/relationships" id="2147483649" r:id="Rf88c586f2aea49c7"/>
-    <p:sldLayoutId xmlns:r="http://schemas.openxmlformats.org/officeDocument/2006/relationships" id="2147483650" r:id="Re2d58067d173435e"/>
-    <p:sldLayoutId xmlns:r="http://schemas.openxmlformats.org/officeDocument/2006/relationships" id="2147483651" r:id="R8c975114fb134408"/>
-    <p:sldLayoutId xmlns:r="http://schemas.openxmlformats.org/officeDocument/2006/relationships" id="2147483652" r:id="R831473ebfbce458e"/>
-    <p:sldLayoutId xmlns:r="http://schemas.openxmlformats.org/officeDocument/2006/relationships" id="2147483653" r:id="R376e9d49befb4951"/>
-    <p:sldLayoutId xmlns:r="http://schemas.openxmlformats.org/officeDocument/2006/relationships" id="2147483654" r:id="R4ae24ddb305c437d"/>
-    <p:sldLayoutId xmlns:r="http://schemas.openxmlformats.org/officeDocument/2006/relationships" id="2147483655" r:id="R3f99763539bc454a"/>
-    <p:sldLayoutId xmlns:r="http://schemas.openxmlformats.org/officeDocument/2006/relationships" id="2147483656" r:id="R8dd09e76d8c04254"/>
-    <p:sldLayoutId xmlns:r="http://schemas.openxmlformats.org/officeDocument/2006/relationships" id="2147483657" r:id="R057bfa714935420d"/>
-    <p:sldLayoutId xmlns:r="http://schemas.openxmlformats.org/officeDocument/2006/relationships" id="2147483658" r:id="R408061cedaca4edb"/>
-    <p:sldLayoutId xmlns:r="http://schemas.openxmlformats.org/officeDocument/2006/relationships" id="2147483659" r:id="Ra469e901722d41ae"/>
+    <p:sldLayoutId xmlns:r="http://schemas.openxmlformats.org/officeDocument/2006/relationships" id="2147483649" r:id="R12606f8c522c4f76"/>
+    <p:sldLayoutId xmlns:r="http://schemas.openxmlformats.org/officeDocument/2006/relationships" id="2147483650" r:id="Reecbad75c1c64df5"/>
+    <p:sldLayoutId xmlns:r="http://schemas.openxmlformats.org/officeDocument/2006/relationships" id="2147483651" r:id="Rfd1133cf90cc41f8"/>
+    <p:sldLayoutId xmlns:r="http://schemas.openxmlformats.org/officeDocument/2006/relationships" id="2147483652" r:id="R7f16346a777d4adf"/>
+    <p:sldLayoutId xmlns:r="http://schemas.openxmlformats.org/officeDocument/2006/relationships" id="2147483653" r:id="R810b982ac42e4f30"/>
+    <p:sldLayoutId xmlns:r="http://schemas.openxmlformats.org/officeDocument/2006/relationships" id="2147483654" r:id="Rce1160544c32485c"/>
+    <p:sldLayoutId xmlns:r="http://schemas.openxmlformats.org/officeDocument/2006/relationships" id="2147483655" r:id="R13ccc962a94545df"/>
+    <p:sldLayoutId xmlns:r="http://schemas.openxmlformats.org/officeDocument/2006/relationships" id="2147483656" r:id="R6b88828eb8314302"/>
+    <p:sldLayoutId xmlns:r="http://schemas.openxmlformats.org/officeDocument/2006/relationships" id="2147483657" r:id="R1394bdaf75e94d1e"/>
+    <p:sldLayoutId xmlns:r="http://schemas.openxmlformats.org/officeDocument/2006/relationships" id="2147483658" r:id="Re9165f966f58431d"/>
+    <p:sldLayoutId xmlns:r="http://schemas.openxmlformats.org/officeDocument/2006/relationships" id="2147483659" r:id="Rf567b982456c4026"/>
   </p:sldLayoutIdLst>
   <p:txStyles>
     <p:titleStyle>
@@ -5848,7 +6061,7 @@
           <p:cNvPr id="2" name="Content Placeholder 2">
             <a:extLst xmlns:a="http://schemas.openxmlformats.org/drawingml/2006/main">
               <a:ext uri="{FF2B5EF4-FFF2-40B4-BE49-F238E27FC236}">
-                <a16:creationId xmlns:a16="http://schemas.microsoft.com/office/drawing/2014/main" id="{7F82553E-233C-4555-A6AC-8BF0D00BBEFF}"/>
+                <a16:creationId xmlns:a16="http://schemas.microsoft.com/office/drawing/2014/main" id="{F9F982B7-E689-4A5C-89F6-7AC254215BEA}"/>
               </a:ext>
             </a:extLst>
           </p:cNvPr>
@@ -5868,7 +6081,7 @@
               <a:buNone/>
             </a:pPr>
             <a:r>
-              <a:t>The page binds to the view model.</a:t>
+              <a:t>A sample item has the right total.</a:t>
             </a:r>
           </a:p>
           <a:p xmlns:a="http://schemas.openxmlformats.org/drawingml/2006/main">
@@ -5876,7 +6089,7 @@
               <a:buNone/>
             </a:pPr>
             <a:r>
-              <a:t>Valid values enable Submit.</a:t>
+              <a:t>The in-memory service changes the list.</a:t>
             </a:r>
           </a:p>
         </p:txBody>
@@ -5909,44 +6122,16 @@
           <a:lstStyle xmlns:a="http://schemas.openxmlformats.org/drawingml/2006/main"/>
           <a:p xmlns:a="http://schemas.openxmlformats.org/drawingml/2006/main">
             <a:r>
-              <a:t>Step 5 Check</a:t>
+              <a:t>Step 3: What changed?</a:t>
             </a:r>
             <a:endParaRPr/>
           </a:p>
         </p:txBody>
       </p:sp>
-      <p:pic>
-        <p:nvPicPr>
-          <p:cNvPr id="4" name="">
-            <a:extLst xmlns:a="http://schemas.openxmlformats.org/drawingml/2006/main">
-              <a:ext uri="{FF2B5EF4-FFF2-40B4-BE49-F238E27FC236}">
-                <a16:creationId xmlns:a16="http://schemas.microsoft.com/office/drawing/2014/main" id="{2869C871-13CD-4FD6-91D7-3B503FD3AE6A}"/>
-              </a:ext>
-            </a:extLst>
-          </p:cNvPr>
-          <p:cNvPicPr>
-            <a:picLocks xmlns:a="http://schemas.openxmlformats.org/drawingml/2006/main" noChangeAspect="1"/>
-          </p:cNvPicPr>
-          <p:nvPr/>
-        </p:nvPicPr>
-        <p:blipFill>
-          <a:blip xmlns:r="http://schemas.openxmlformats.org/officeDocument/2006/relationships" xmlns:a="http://schemas.openxmlformats.org/drawingml/2006/main" r:embed="Rc15fd64b8dd442ee"/>
-          <a:stretch xmlns:a="http://schemas.openxmlformats.org/drawingml/2006/main"/>
-        </p:blipFill>
-        <p:spPr>
-          <a:xfrm xmlns:a="http://schemas.openxmlformats.org/drawingml/2006/main">
-            <a:off x="3133823" y="3190875"/>
-            <a:ext cx="5924355" cy="3048000"/>
-          </a:xfrm>
-          <a:prstGeom xmlns:a="http://schemas.openxmlformats.org/drawingml/2006/main" prst="rect">
-            <a:avLst/>
-          </a:prstGeom>
-        </p:spPr>
-      </p:pic>
     </p:spTree>
     <p:extLst>
       <p:ext uri="{BB962C8B-B14F-4D97-AF65-F5344CB8AC3E}">
-        <p14:creationId xmlns:p14="http://schemas.microsoft.com/office/powerpoint/2010/main" val="945492485"/>
+        <p14:creationId xmlns:p14="http://schemas.microsoft.com/office/powerpoint/2010/main" val="506133255"/>
       </p:ext>
     </p:extLst>
   </p:cSld>
@@ -5970,7 +6155,7 @@
           <p:cNvPr id="2" name="Content Placeholder 2">
             <a:extLst xmlns:a="http://schemas.openxmlformats.org/drawingml/2006/main">
               <a:ext uri="{FF2B5EF4-FFF2-40B4-BE49-F238E27FC236}">
-                <a16:creationId xmlns:a16="http://schemas.microsoft.com/office/drawing/2014/main" id="{7F82553E-233C-4555-A6AC-8BF0D00BBEFF}"/>
+                <a16:creationId xmlns:a16="http://schemas.microsoft.com/office/drawing/2014/main" id="{F9F982B7-E689-4A5C-89F6-7AC254215BEA}"/>
               </a:ext>
             </a:extLst>
           </p:cNvPr>
@@ -5990,7 +6175,7 @@
               <a:buNone/>
             </a:pPr>
             <a:r>
-              <a:t>Commands own Add, Edit, and Delete decisions.</a:t>
+              <a:t>Generated properties hold form state.</a:t>
             </a:r>
           </a:p>
           <a:p xmlns:a="http://schemas.openxmlformats.org/drawingml/2006/main">
@@ -5998,7 +6183,7 @@
               <a:buNone/>
             </a:pPr>
             <a:r>
-              <a:t>An interface supplies UI results.</a:t>
+              <a:t>Validation controls Submit.</a:t>
             </a:r>
           </a:p>
         </p:txBody>
@@ -6031,7 +6216,7 @@
           <a:lstStyle xmlns:a="http://schemas.openxmlformats.org/drawingml/2006/main"/>
           <a:p xmlns:a="http://schemas.openxmlformats.org/drawingml/2006/main">
             <a:r>
-              <a:t>Step 7 BOM view model</a:t>
+              <a:t>Step 5: Editor view model</a:t>
             </a:r>
             <a:endParaRPr/>
           </a:p>
@@ -6040,7 +6225,7 @@
     </p:spTree>
     <p:extLst>
       <p:ext uri="{BB962C8B-B14F-4D97-AF65-F5344CB8AC3E}">
-        <p14:creationId xmlns:p14="http://schemas.microsoft.com/office/powerpoint/2010/main" val="684651204"/>
+        <p14:creationId xmlns:p14="http://schemas.microsoft.com/office/powerpoint/2010/main" val="960357134"/>
       </p:ext>
     </p:extLst>
   </p:cSld>
@@ -6064,7 +6249,7 @@
           <p:cNvPr id="2" name="Content Placeholder 2">
             <a:extLst xmlns:a="http://schemas.openxmlformats.org/drawingml/2006/main">
               <a:ext uri="{FF2B5EF4-FFF2-40B4-BE49-F238E27FC236}">
-                <a16:creationId xmlns:a16="http://schemas.microsoft.com/office/drawing/2014/main" id="{7F82553E-233C-4555-A6AC-8BF0D00BBEFF}"/>
+                <a16:creationId xmlns:a16="http://schemas.microsoft.com/office/drawing/2014/main" id="{F9F982B7-E689-4A5C-89F6-7AC254215BEA}"/>
               </a:ext>
             </a:extLst>
           </p:cNvPr>
@@ -6084,7 +6269,7 @@
               <a:buNone/>
             </a:pPr>
             <a:r>
-              <a:t>The BOM shows the changed rows.</a:t>
+              <a:t>The page binds to the view model.</a:t>
             </a:r>
           </a:p>
           <a:p xmlns:a="http://schemas.openxmlformats.org/drawingml/2006/main">
@@ -6092,7 +6277,7 @@
               <a:buNone/>
             </a:pPr>
             <a:r>
-              <a:t>Cancel keeps the original row.</a:t>
+              <a:t>Valid values enable Submit.</a:t>
             </a:r>
           </a:p>
         </p:txBody>
@@ -6125,7 +6310,7 @@
           <a:lstStyle xmlns:a="http://schemas.openxmlformats.org/drawingml/2006/main"/>
           <a:p xmlns:a="http://schemas.openxmlformats.org/drawingml/2006/main">
             <a:r>
-              <a:t>Step 7 Check</a:t>
+              <a:t>Step 5: What changed?</a:t>
             </a:r>
             <a:endParaRPr/>
           </a:p>
@@ -6136,7 +6321,7 @@
           <p:cNvPr id="4" name="">
             <a:extLst xmlns:a="http://schemas.openxmlformats.org/drawingml/2006/main">
               <a:ext uri="{FF2B5EF4-FFF2-40B4-BE49-F238E27FC236}">
-                <a16:creationId xmlns:a16="http://schemas.microsoft.com/office/drawing/2014/main" id="{A468AC52-1FC2-4E95-AD73-602FC7702721}"/>
+                <a16:creationId xmlns:a16="http://schemas.microsoft.com/office/drawing/2014/main" id="{7698F4A7-8BA1-43F8-97F3-078674BEFC2A}"/>
               </a:ext>
             </a:extLst>
           </p:cNvPr>
@@ -6146,7 +6331,7 @@
           <p:nvPr/>
         </p:nvPicPr>
         <p:blipFill>
-          <a:blip xmlns:r="http://schemas.openxmlformats.org/officeDocument/2006/relationships" xmlns:a="http://schemas.openxmlformats.org/drawingml/2006/main" r:embed="R25df9516a9304405"/>
+          <a:blip xmlns:r="http://schemas.openxmlformats.org/officeDocument/2006/relationships" xmlns:a="http://schemas.openxmlformats.org/drawingml/2006/main" r:embed="R9b37fab157234365"/>
           <a:stretch xmlns:a="http://schemas.openxmlformats.org/drawingml/2006/main"/>
         </p:blipFill>
         <p:spPr>
@@ -6162,7 +6347,7 @@
     </p:spTree>
     <p:extLst>
       <p:ext uri="{BB962C8B-B14F-4D97-AF65-F5344CB8AC3E}">
-        <p14:creationId xmlns:p14="http://schemas.microsoft.com/office/powerpoint/2010/main" val="915483211"/>
+        <p14:creationId xmlns:p14="http://schemas.microsoft.com/office/powerpoint/2010/main" val="563279116"/>
       </p:ext>
     </p:extLst>
   </p:cSld>
@@ -6186,7 +6371,7 @@
           <p:cNvPr id="2" name="Content Placeholder 2">
             <a:extLst xmlns:a="http://schemas.openxmlformats.org/drawingml/2006/main">
               <a:ext uri="{FF2B5EF4-FFF2-40B4-BE49-F238E27FC236}">
-                <a16:creationId xmlns:a16="http://schemas.microsoft.com/office/drawing/2014/main" id="{7F82553E-233C-4555-A6AC-8BF0D00BBEFF}"/>
+                <a16:creationId xmlns:a16="http://schemas.microsoft.com/office/drawing/2014/main" id="{F9F982B7-E689-4A5C-89F6-7AC254215BEA}"/>
               </a:ext>
             </a:extLst>
           </p:cNvPr>
@@ -6206,7 +6391,7 @@
               <a:buNone/>
             </a:pPr>
             <a:r>
-              <a:t>Register services, view models, and pages.</a:t>
+              <a:t>Commands own Add, Edit, and Delete decisions.</a:t>
             </a:r>
           </a:p>
           <a:p xmlns:a="http://schemas.openxmlformats.org/drawingml/2006/main">
@@ -6214,7 +6399,7 @@
               <a:buNone/>
             </a:pPr>
             <a:r>
-              <a:t>Shell opens the app destinations.</a:t>
+              <a:t>An interface supplies UI results.</a:t>
             </a:r>
           </a:p>
         </p:txBody>
@@ -6247,7 +6432,7 @@
           <a:lstStyle xmlns:a="http://schemas.openxmlformats.org/drawingml/2006/main"/>
           <a:p xmlns:a="http://schemas.openxmlformats.org/drawingml/2006/main">
             <a:r>
-              <a:t>Step 9 App composition</a:t>
+              <a:t>Step 7: BOM view model</a:t>
             </a:r>
             <a:endParaRPr/>
           </a:p>
@@ -6256,7 +6441,7 @@
     </p:spTree>
     <p:extLst>
       <p:ext uri="{BB962C8B-B14F-4D97-AF65-F5344CB8AC3E}">
-        <p14:creationId xmlns:p14="http://schemas.microsoft.com/office/powerpoint/2010/main" val="1434717079"/>
+        <p14:creationId xmlns:p14="http://schemas.microsoft.com/office/powerpoint/2010/main" val="2128250315"/>
       </p:ext>
     </p:extLst>
   </p:cSld>
@@ -6280,7 +6465,7 @@
           <p:cNvPr id="2" name="Content Placeholder 2">
             <a:extLst xmlns:a="http://schemas.openxmlformats.org/drawingml/2006/main">
               <a:ext uri="{FF2B5EF4-FFF2-40B4-BE49-F238E27FC236}">
-                <a16:creationId xmlns:a16="http://schemas.microsoft.com/office/drawing/2014/main" id="{7F82553E-233C-4555-A6AC-8BF0D00BBEFF}"/>
+                <a16:creationId xmlns:a16="http://schemas.microsoft.com/office/drawing/2014/main" id="{F9F982B7-E689-4A5C-89F6-7AC254215BEA}"/>
               </a:ext>
             </a:extLst>
           </p:cNvPr>
@@ -6300,7 +6485,7 @@
               <a:buNone/>
             </a:pPr>
             <a:r>
-              <a:t>Home, BOM, and Help open.</a:t>
+              <a:t>The BOM shows the changed rows.</a:t>
             </a:r>
           </a:p>
           <a:p xmlns:a="http://schemas.openxmlformats.org/drawingml/2006/main">
@@ -6308,7 +6493,7 @@
               <a:buNone/>
             </a:pPr>
             <a:r>
-              <a:t>The editor opens for Add and Edit.</a:t>
+              <a:t>Cancel keeps the original row.</a:t>
             </a:r>
           </a:p>
         </p:txBody>
@@ -6341,7 +6526,7 @@
           <a:lstStyle xmlns:a="http://schemas.openxmlformats.org/drawingml/2006/main"/>
           <a:p xmlns:a="http://schemas.openxmlformats.org/drawingml/2006/main">
             <a:r>
-              <a:t>Step 9 Check</a:t>
+              <a:t>Step 7: What changed?</a:t>
             </a:r>
             <a:endParaRPr/>
           </a:p>
@@ -6352,7 +6537,7 @@
           <p:cNvPr id="4" name="">
             <a:extLst xmlns:a="http://schemas.openxmlformats.org/drawingml/2006/main">
               <a:ext uri="{FF2B5EF4-FFF2-40B4-BE49-F238E27FC236}">
-                <a16:creationId xmlns:a16="http://schemas.microsoft.com/office/drawing/2014/main" id="{3A2C6B1F-4641-496D-A30B-5836CBDF75D3}"/>
+                <a16:creationId xmlns:a16="http://schemas.microsoft.com/office/drawing/2014/main" id="{C4E272AE-B1EB-4F94-886D-0582F234EC5C}"/>
               </a:ext>
             </a:extLst>
           </p:cNvPr>
@@ -6362,7 +6547,7 @@
           <p:nvPr/>
         </p:nvPicPr>
         <p:blipFill>
-          <a:blip xmlns:r="http://schemas.openxmlformats.org/officeDocument/2006/relationships" xmlns:a="http://schemas.openxmlformats.org/drawingml/2006/main" r:embed="R33d6ffbb851c4b32"/>
+          <a:blip xmlns:r="http://schemas.openxmlformats.org/officeDocument/2006/relationships" xmlns:a="http://schemas.openxmlformats.org/drawingml/2006/main" r:embed="R930e59b4dd3c4ee0"/>
           <a:stretch xmlns:a="http://schemas.openxmlformats.org/drawingml/2006/main"/>
         </p:blipFill>
         <p:spPr>
@@ -6378,7 +6563,7 @@
     </p:spTree>
     <p:extLst>
       <p:ext uri="{BB962C8B-B14F-4D97-AF65-F5344CB8AC3E}">
-        <p14:creationId xmlns:p14="http://schemas.microsoft.com/office/powerpoint/2010/main" val="183221971"/>
+        <p14:creationId xmlns:p14="http://schemas.microsoft.com/office/powerpoint/2010/main" val="2130702402"/>
       </p:ext>
     </p:extLst>
   </p:cSld>
@@ -6402,7 +6587,7 @@
           <p:cNvPr id="2" name="Content Placeholder 2">
             <a:extLst xmlns:a="http://schemas.openxmlformats.org/drawingml/2006/main">
               <a:ext uri="{FF2B5EF4-FFF2-40B4-BE49-F238E27FC236}">
-                <a16:creationId xmlns:a16="http://schemas.microsoft.com/office/drawing/2014/main" id="{7F82553E-233C-4555-A6AC-8BF0D00BBEFF}"/>
+                <a16:creationId xmlns:a16="http://schemas.microsoft.com/office/drawing/2014/main" id="{F9F982B7-E689-4A5C-89F6-7AC254215BEA}"/>
               </a:ext>
             </a:extLst>
           </p:cNvPr>
@@ -6422,7 +6607,7 @@
               <a:buNone/>
             </a:pPr>
             <a:r>
-              <a:t>Swap in JsonBomService.</a:t>
+              <a:t>Register services, view models, and pages.</a:t>
             </a:r>
           </a:p>
           <a:p xmlns:a="http://schemas.openxmlformats.org/drawingml/2006/main">
@@ -6430,7 +6615,7 @@
               <a:buNone/>
             </a:pPr>
             <a:r>
-              <a:t>Load items when the BOM page appears.</a:t>
+              <a:t>Shell opens the app destinations.</a:t>
             </a:r>
           </a:p>
         </p:txBody>
@@ -6463,7 +6648,7 @@
           <a:lstStyle xmlns:a="http://schemas.openxmlformats.org/drawingml/2006/main"/>
           <a:p xmlns:a="http://schemas.openxmlformats.org/drawingml/2006/main">
             <a:r>
-              <a:t>Step 10 JSON persistence</a:t>
+              <a:t>Step 9: App composition</a:t>
             </a:r>
             <a:endParaRPr/>
           </a:p>
@@ -6472,7 +6657,7 @@
     </p:spTree>
     <p:extLst>
       <p:ext uri="{BB962C8B-B14F-4D97-AF65-F5344CB8AC3E}">
-        <p14:creationId xmlns:p14="http://schemas.microsoft.com/office/powerpoint/2010/main" val="953263055"/>
+        <p14:creationId xmlns:p14="http://schemas.microsoft.com/office/powerpoint/2010/main" val="1100086146"/>
       </p:ext>
     </p:extLst>
   </p:cSld>
@@ -6496,7 +6681,7 @@
           <p:cNvPr id="2" name="Content Placeholder 2">
             <a:extLst xmlns:a="http://schemas.openxmlformats.org/drawingml/2006/main">
               <a:ext uri="{FF2B5EF4-FFF2-40B4-BE49-F238E27FC236}">
-                <a16:creationId xmlns:a16="http://schemas.microsoft.com/office/drawing/2014/main" id="{7F82553E-233C-4555-A6AC-8BF0D00BBEFF}"/>
+                <a16:creationId xmlns:a16="http://schemas.microsoft.com/office/drawing/2014/main" id="{F9F982B7-E689-4A5C-89F6-7AC254215BEA}"/>
               </a:ext>
             </a:extLst>
           </p:cNvPr>
@@ -6516,7 +6701,7 @@
               <a:buNone/>
             </a:pPr>
             <a:r>
-              <a:t>Items survive restart.</a:t>
+              <a:t>Home, BOM, and Help open.</a:t>
             </a:r>
           </a:p>
           <a:p xmlns:a="http://schemas.openxmlformats.org/drawingml/2006/main">
@@ -6524,7 +6709,7 @@
               <a:buNone/>
             </a:pPr>
             <a:r>
-              <a:t>The same BOM workflow still works.</a:t>
+              <a:t>The editor opens for Add and Edit.</a:t>
             </a:r>
           </a:p>
         </p:txBody>
@@ -6557,16 +6742,44 @@
           <a:lstStyle xmlns:a="http://schemas.openxmlformats.org/drawingml/2006/main"/>
           <a:p xmlns:a="http://schemas.openxmlformats.org/drawingml/2006/main">
             <a:r>
-              <a:t>Step 10 Check</a:t>
+              <a:t>Step 9: What changed?</a:t>
             </a:r>
             <a:endParaRPr/>
           </a:p>
         </p:txBody>
       </p:sp>
+      <p:pic>
+        <p:nvPicPr>
+          <p:cNvPr id="4" name="">
+            <a:extLst xmlns:a="http://schemas.openxmlformats.org/drawingml/2006/main">
+              <a:ext uri="{FF2B5EF4-FFF2-40B4-BE49-F238E27FC236}">
+                <a16:creationId xmlns:a16="http://schemas.microsoft.com/office/drawing/2014/main" id="{9FEBC75F-63FD-4F63-8584-6AADC67EE704}"/>
+              </a:ext>
+            </a:extLst>
+          </p:cNvPr>
+          <p:cNvPicPr>
+            <a:picLocks xmlns:a="http://schemas.openxmlformats.org/drawingml/2006/main" noChangeAspect="1"/>
+          </p:cNvPicPr>
+          <p:nvPr/>
+        </p:nvPicPr>
+        <p:blipFill>
+          <a:blip xmlns:r="http://schemas.openxmlformats.org/officeDocument/2006/relationships" xmlns:a="http://schemas.openxmlformats.org/drawingml/2006/main" r:embed="Rd9d827634abd4923"/>
+          <a:stretch xmlns:a="http://schemas.openxmlformats.org/drawingml/2006/main"/>
+        </p:blipFill>
+        <p:spPr>
+          <a:xfrm xmlns:a="http://schemas.openxmlformats.org/drawingml/2006/main">
+            <a:off x="3133823" y="3190875"/>
+            <a:ext cx="5924355" cy="3048000"/>
+          </a:xfrm>
+          <a:prstGeom xmlns:a="http://schemas.openxmlformats.org/drawingml/2006/main" prst="rect">
+            <a:avLst/>
+          </a:prstGeom>
+        </p:spPr>
+      </p:pic>
     </p:spTree>
     <p:extLst>
       <p:ext uri="{BB962C8B-B14F-4D97-AF65-F5344CB8AC3E}">
-        <p14:creationId xmlns:p14="http://schemas.microsoft.com/office/powerpoint/2010/main" val="722191410"/>
+        <p14:creationId xmlns:p14="http://schemas.microsoft.com/office/powerpoint/2010/main" val="1167201269"/>
       </p:ext>
     </p:extLst>
   </p:cSld>
@@ -6590,7 +6803,7 @@
           <p:cNvPr id="2" name="Content Placeholder 2">
             <a:extLst xmlns:a="http://schemas.openxmlformats.org/drawingml/2006/main">
               <a:ext uri="{FF2B5EF4-FFF2-40B4-BE49-F238E27FC236}">
-                <a16:creationId xmlns:a16="http://schemas.microsoft.com/office/drawing/2014/main" id="{7F82553E-233C-4555-A6AC-8BF0D00BBEFF}"/>
+                <a16:creationId xmlns:a16="http://schemas.microsoft.com/office/drawing/2014/main" id="{F9F982B7-E689-4A5C-89F6-7AC254215BEA}"/>
               </a:ext>
             </a:extLst>
           </p:cNvPr>
@@ -6610,7 +6823,7 @@
               <a:buNone/>
             </a:pPr>
             <a:r>
-              <a:t>Test save and reload.</a:t>
+              <a:t>Swap in JsonBomService.</a:t>
             </a:r>
           </a:p>
           <a:p xmlns:a="http://schemas.openxmlformats.org/drawingml/2006/main">
@@ -6618,7 +6831,7 @@
               <a:buNone/>
             </a:pPr>
             <a:r>
-              <a:t>Test decisions with a fake UI service.</a:t>
+              <a:t>Load items when the BOM page appears.</a:t>
             </a:r>
           </a:p>
         </p:txBody>
@@ -6651,7 +6864,7 @@
           <a:lstStyle xmlns:a="http://schemas.openxmlformats.org/drawingml/2006/main"/>
           <a:p xmlns:a="http://schemas.openxmlformats.org/drawingml/2006/main">
             <a:r>
-              <a:t>Step 11 Test the redo</a:t>
+              <a:t>Step 10: JSON persistence</a:t>
             </a:r>
             <a:endParaRPr/>
           </a:p>
@@ -6660,7 +6873,7 @@
     </p:spTree>
     <p:extLst>
       <p:ext uri="{BB962C8B-B14F-4D97-AF65-F5344CB8AC3E}">
-        <p14:creationId xmlns:p14="http://schemas.microsoft.com/office/powerpoint/2010/main" val="16935205"/>
+        <p14:creationId xmlns:p14="http://schemas.microsoft.com/office/powerpoint/2010/main" val="32806923"/>
       </p:ext>
     </p:extLst>
   </p:cSld>
@@ -6684,7 +6897,7 @@
           <p:cNvPr id="2" name="Content Placeholder 2">
             <a:extLst xmlns:a="http://schemas.openxmlformats.org/drawingml/2006/main">
               <a:ext uri="{FF2B5EF4-FFF2-40B4-BE49-F238E27FC236}">
-                <a16:creationId xmlns:a16="http://schemas.microsoft.com/office/drawing/2014/main" id="{7F82553E-233C-4555-A6AC-8BF0D00BBEFF}"/>
+                <a16:creationId xmlns:a16="http://schemas.microsoft.com/office/drawing/2014/main" id="{F9F982B7-E689-4A5C-89F6-7AC254215BEA}"/>
               </a:ext>
             </a:extLst>
           </p:cNvPr>
@@ -6704,7 +6917,7 @@
               <a:buNone/>
             </a:pPr>
             <a:r>
-              <a:t>Automated tests pass.</a:t>
+              <a:t>Items survive restart.</a:t>
             </a:r>
           </a:p>
           <a:p xmlns:a="http://schemas.openxmlformats.org/drawingml/2006/main">
@@ -6712,7 +6925,7 @@
               <a:buNone/>
             </a:pPr>
             <a:r>
-              <a:t>Add, Edit, Cancel, and Delete work.</a:t>
+              <a:t>The same BOM workflow still works.</a:t>
             </a:r>
           </a:p>
         </p:txBody>
@@ -6745,7 +6958,7 @@
           <a:lstStyle xmlns:a="http://schemas.openxmlformats.org/drawingml/2006/main"/>
           <a:p xmlns:a="http://schemas.openxmlformats.org/drawingml/2006/main">
             <a:r>
-              <a:t>Step 11 Check</a:t>
+              <a:t>Step 10: What changed?</a:t>
             </a:r>
             <a:endParaRPr/>
           </a:p>
@@ -6754,7 +6967,7 @@
     </p:spTree>
     <p:extLst>
       <p:ext uri="{BB962C8B-B14F-4D97-AF65-F5344CB8AC3E}">
-        <p14:creationId xmlns:p14="http://schemas.microsoft.com/office/powerpoint/2010/main" val="1498543845"/>
+        <p14:creationId xmlns:p14="http://schemas.microsoft.com/office/powerpoint/2010/main" val="2048760956"/>
       </p:ext>
     </p:extLst>
   </p:cSld>
@@ -6778,7 +6991,7 @@
           <p:cNvPr id="2" name="Content Placeholder 2">
             <a:extLst xmlns:a="http://schemas.openxmlformats.org/drawingml/2006/main">
               <a:ext uri="{FF2B5EF4-FFF2-40B4-BE49-F238E27FC236}">
-                <a16:creationId xmlns:a16="http://schemas.microsoft.com/office/drawing/2014/main" id="{7F82553E-233C-4555-A6AC-8BF0D00BBEFF}"/>
+                <a16:creationId xmlns:a16="http://schemas.microsoft.com/office/drawing/2014/main" id="{F9F982B7-E689-4A5C-89F6-7AC254215BEA}"/>
               </a:ext>
             </a:extLst>
           </p:cNvPr>
@@ -6798,7 +7011,7 @@
               <a:buNone/>
             </a:pPr>
             <a:r>
-              <a:t>Show the completed app workflow.</a:t>
+              <a:t>Test save and reload.</a:t>
             </a:r>
           </a:p>
           <a:p xmlns:a="http://schemas.openxmlformats.org/drawingml/2006/main">
@@ -6806,15 +7019,7 @@
               <a:buNone/>
             </a:pPr>
             <a:r>
-              <a:t>Explain which responsibility changed.</a:t>
-            </a:r>
-          </a:p>
-          <a:p xmlns:a="http://schemas.openxmlformats.org/drawingml/2006/main">
-            <a:pPr lvl="0">
-              <a:buNone/>
-            </a:pPr>
-            <a:r>
-              <a:t>Check the result before the next module.</a:t>
+              <a:t>Test decisions with a fake UI service.</a:t>
             </a:r>
           </a:p>
         </p:txBody>
@@ -6847,7 +7052,7 @@
           <a:lstStyle xmlns:a="http://schemas.openxmlformats.org/drawingml/2006/main"/>
           <a:p xmlns:a="http://schemas.openxmlformats.org/drawingml/2006/main">
             <a:r>
-              <a:t>Module review</a:t>
+              <a:t>Step 11: Test the redo</a:t>
             </a:r>
             <a:endParaRPr/>
           </a:p>
@@ -6856,7 +7061,7 @@
     </p:spTree>
     <p:extLst>
       <p:ext uri="{BB962C8B-B14F-4D97-AF65-F5344CB8AC3E}">
-        <p14:creationId xmlns:p14="http://schemas.microsoft.com/office/powerpoint/2010/main" val="1016003529"/>
+        <p14:creationId xmlns:p14="http://schemas.microsoft.com/office/powerpoint/2010/main" val="1020299917"/>
       </p:ext>
     </p:extLst>
   </p:cSld>
@@ -6880,7 +7085,7 @@
           <p:cNvPr id="2" name="Content Placeholder 2">
             <a:extLst xmlns:a="http://schemas.openxmlformats.org/drawingml/2006/main">
               <a:ext uri="{FF2B5EF4-FFF2-40B4-BE49-F238E27FC236}">
-                <a16:creationId xmlns:a16="http://schemas.microsoft.com/office/drawing/2014/main" id="{7F82553E-233C-4555-A6AC-8BF0D00BBEFF}"/>
+                <a16:creationId xmlns:a16="http://schemas.microsoft.com/office/drawing/2014/main" id="{F9F982B7-E689-4A5C-89F6-7AC254215BEA}"/>
               </a:ext>
             </a:extLst>
           </p:cNvPr>
@@ -6949,7 +7154,7 @@
           <a:lstStyle xmlns:a="http://schemas.openxmlformats.org/drawingml/2006/main"/>
           <a:p xmlns:a="http://schemas.openxmlformats.org/drawingml/2006/main">
             <a:r>
-              <a:t>Exercise overview</a:t>
+              <a:t>What you will build</a:t>
             </a:r>
             <a:endParaRPr/>
           </a:p>
@@ -6958,7 +7163,305 @@
     </p:spTree>
     <p:extLst>
       <p:ext uri="{BB962C8B-B14F-4D97-AF65-F5344CB8AC3E}">
-        <p14:creationId xmlns:p14="http://schemas.microsoft.com/office/powerpoint/2010/main" val="664507407"/>
+        <p14:creationId xmlns:p14="http://schemas.microsoft.com/office/powerpoint/2010/main" val="771164653"/>
+      </p:ext>
+    </p:extLst>
+  </p:cSld>
+</p:sld>
+</file>
+
+<file path=ppt/slides/slide20.xml><?xml version="1.0" encoding="utf-8"?>
+<p:sld xmlns:p="http://schemas.openxmlformats.org/presentationml/2006/main">
+  <p:cSld>
+    <p:spTree>
+      <p:nvGrpSpPr>
+        <p:cNvPr id="1" name=""/>
+        <p:cNvGrpSpPr/>
+        <p:nvPr/>
+      </p:nvGrpSpPr>
+      <p:grpSpPr>
+        <a:xfrm xmlns:a="http://schemas.openxmlformats.org/drawingml/2006/main"/>
+      </p:grpSpPr>
+      <p:sp>
+        <p:nvSpPr>
+          <p:cNvPr id="2" name="Content Placeholder 2">
+            <a:extLst xmlns:a="http://schemas.openxmlformats.org/drawingml/2006/main">
+              <a:ext uri="{FF2B5EF4-FFF2-40B4-BE49-F238E27FC236}">
+                <a16:creationId xmlns:a16="http://schemas.microsoft.com/office/drawing/2014/main" id="{F9F982B7-E689-4A5C-89F6-7AC254215BEA}"/>
+              </a:ext>
+            </a:extLst>
+          </p:cNvPr>
+          <p:cNvSpPr>
+            <a:spLocks xmlns:a="http://schemas.openxmlformats.org/drawingml/2006/main" noGrp="1"/>
+          </p:cNvSpPr>
+          <p:nvPr>
+            <p:ph idx="1"/>
+          </p:nvPr>
+        </p:nvSpPr>
+        <p:spPr/>
+        <p:txBody>
+          <a:bodyPr xmlns:a="http://schemas.openxmlformats.org/drawingml/2006/main"/>
+          <a:lstStyle xmlns:a="http://schemas.openxmlformats.org/drawingml/2006/main"/>
+          <a:p xmlns:a="http://schemas.openxmlformats.org/drawingml/2006/main">
+            <a:pPr lvl="0">
+              <a:buNone/>
+            </a:pPr>
+            <a:r>
+              <a:t>Automated tests pass.</a:t>
+            </a:r>
+          </a:p>
+          <a:p xmlns:a="http://schemas.openxmlformats.org/drawingml/2006/main">
+            <a:pPr lvl="0">
+              <a:buNone/>
+            </a:pPr>
+            <a:r>
+              <a:t>Add, Edit, Cancel, and Delete work.</a:t>
+            </a:r>
+          </a:p>
+        </p:txBody>
+      </p:sp>
+      <p:sp>
+        <p:nvSpPr>
+          <p:cNvPr id="3" name="Title Placeholder 1">
+            <a:extLst xmlns:a="http://schemas.openxmlformats.org/drawingml/2006/main">
+              <a:ext uri="{FF2B5EF4-FFF2-40B4-BE49-F238E27FC236}">
+                <a16:creationId xmlns:a16="http://schemas.microsoft.com/office/drawing/2014/main" id="{2DF4F548-EDEF-186D-6633-AF1ABC814BC1}"/>
+              </a:ext>
+            </a:extLst>
+          </p:cNvPr>
+          <p:cNvSpPr>
+            <a:spLocks xmlns:a="http://schemas.openxmlformats.org/drawingml/2006/main" noGrp="1"/>
+          </p:cNvSpPr>
+          <p:nvPr>
+            <p:ph type="title" idx="0"/>
+          </p:nvPr>
+        </p:nvSpPr>
+        <p:spPr>
+          <a:prstGeom xmlns:a="http://schemas.openxmlformats.org/drawingml/2006/main" prst="rect">
+            <a:avLst/>
+          </a:prstGeom>
+        </p:spPr>
+        <p:txBody>
+          <a:bodyPr xmlns:a="http://schemas.openxmlformats.org/drawingml/2006/main" vert="horz" lIns="91440" tIns="45720" rIns="91440" bIns="45720" anchor="ctr">
+            <a:normAutofit fontScale="100000"/>
+          </a:bodyPr>
+          <a:lstStyle xmlns:a="http://schemas.openxmlformats.org/drawingml/2006/main"/>
+          <a:p xmlns:a="http://schemas.openxmlformats.org/drawingml/2006/main">
+            <a:r>
+              <a:t>Step 11: What changed?</a:t>
+            </a:r>
+            <a:endParaRPr/>
+          </a:p>
+        </p:txBody>
+      </p:sp>
+    </p:spTree>
+    <p:extLst>
+      <p:ext uri="{BB962C8B-B14F-4D97-AF65-F5344CB8AC3E}">
+        <p14:creationId xmlns:p14="http://schemas.microsoft.com/office/powerpoint/2010/main" val="396305570"/>
+      </p:ext>
+    </p:extLst>
+  </p:cSld>
+</p:sld>
+</file>
+
+<file path=ppt/slides/slide21.xml><?xml version="1.0" encoding="utf-8"?>
+<p:sld xmlns:p="http://schemas.openxmlformats.org/presentationml/2006/main">
+  <p:cSld>
+    <p:spTree>
+      <p:nvGrpSpPr>
+        <p:cNvPr id="1" name=""/>
+        <p:cNvGrpSpPr/>
+        <p:nvPr/>
+      </p:nvGrpSpPr>
+      <p:grpSpPr>
+        <a:xfrm xmlns:a="http://schemas.openxmlformats.org/drawingml/2006/main"/>
+      </p:grpSpPr>
+      <p:sp>
+        <p:nvSpPr>
+          <p:cNvPr id="2" name="Content Placeholder 2">
+            <a:extLst xmlns:a="http://schemas.openxmlformats.org/drawingml/2006/main">
+              <a:ext uri="{FF2B5EF4-FFF2-40B4-BE49-F238E27FC236}">
+                <a16:creationId xmlns:a16="http://schemas.microsoft.com/office/drawing/2014/main" id="{F9F982B7-E689-4A5C-89F6-7AC254215BEA}"/>
+              </a:ext>
+            </a:extLst>
+          </p:cNvPr>
+          <p:cNvSpPr>
+            <a:spLocks xmlns:a="http://schemas.openxmlformats.org/drawingml/2006/main" noGrp="1"/>
+          </p:cNvSpPr>
+          <p:nvPr>
+            <p:ph idx="1"/>
+          </p:nvPr>
+        </p:nvSpPr>
+        <p:spPr/>
+        <p:txBody>
+          <a:bodyPr xmlns:a="http://schemas.openxmlformats.org/drawingml/2006/main"/>
+          <a:lstStyle xmlns:a="http://schemas.openxmlformats.org/drawingml/2006/main"/>
+          <a:p xmlns:a="http://schemas.openxmlformats.org/drawingml/2006/main">
+            <a:pPr lvl="0">
+              <a:buNone/>
+            </a:pPr>
+            <a:r>
+              <a:t>I can build the estimator from a new MAUI project.</a:t>
+            </a:r>
+          </a:p>
+          <a:p xmlns:a="http://schemas.openxmlformats.org/drawingml/2006/main">
+            <a:pPr lvl="0">
+              <a:buNone/>
+            </a:pPr>
+            <a:r>
+              <a:t>I can trace one action through view, view model, and service.</a:t>
+            </a:r>
+          </a:p>
+          <a:p xmlns:a="http://schemas.openxmlformats.org/drawingml/2006/main">
+            <a:pPr lvl="0">
+              <a:buNone/>
+            </a:pPr>
+            <a:r>
+              <a:t>I can test decisions and saved data separately.</a:t>
+            </a:r>
+          </a:p>
+        </p:txBody>
+      </p:sp>
+      <p:sp>
+        <p:nvSpPr>
+          <p:cNvPr id="3" name="Title Placeholder 1">
+            <a:extLst xmlns:a="http://schemas.openxmlformats.org/drawingml/2006/main">
+              <a:ext uri="{FF2B5EF4-FFF2-40B4-BE49-F238E27FC236}">
+                <a16:creationId xmlns:a16="http://schemas.microsoft.com/office/drawing/2014/main" id="{2DF4F548-EDEF-186D-6633-AF1ABC814BC1}"/>
+              </a:ext>
+            </a:extLst>
+          </p:cNvPr>
+          <p:cNvSpPr>
+            <a:spLocks xmlns:a="http://schemas.openxmlformats.org/drawingml/2006/main" noGrp="1"/>
+          </p:cNvSpPr>
+          <p:nvPr>
+            <p:ph type="title" idx="0"/>
+          </p:nvPr>
+        </p:nvSpPr>
+        <p:spPr>
+          <a:prstGeom xmlns:a="http://schemas.openxmlformats.org/drawingml/2006/main" prst="rect">
+            <a:avLst/>
+          </a:prstGeom>
+        </p:spPr>
+        <p:txBody>
+          <a:bodyPr xmlns:a="http://schemas.openxmlformats.org/drawingml/2006/main" vert="horz" lIns="91440" tIns="45720" rIns="91440" bIns="45720" anchor="ctr">
+            <a:normAutofit fontScale="100000"/>
+          </a:bodyPr>
+          <a:lstStyle xmlns:a="http://schemas.openxmlformats.org/drawingml/2006/main"/>
+          <a:p xmlns:a="http://schemas.openxmlformats.org/drawingml/2006/main">
+            <a:r>
+              <a:t>What you can now explain</a:t>
+            </a:r>
+            <a:endParaRPr/>
+          </a:p>
+        </p:txBody>
+      </p:sp>
+    </p:spTree>
+    <p:extLst>
+      <p:ext uri="{BB962C8B-B14F-4D97-AF65-F5344CB8AC3E}">
+        <p14:creationId xmlns:p14="http://schemas.microsoft.com/office/powerpoint/2010/main" val="1858461322"/>
+      </p:ext>
+    </p:extLst>
+  </p:cSld>
+</p:sld>
+</file>
+
+<file path=ppt/slides/slide22.xml><?xml version="1.0" encoding="utf-8"?>
+<p:sld xmlns:p="http://schemas.openxmlformats.org/presentationml/2006/main">
+  <p:cSld>
+    <p:spTree>
+      <p:nvGrpSpPr>
+        <p:cNvPr id="1" name=""/>
+        <p:cNvGrpSpPr/>
+        <p:nvPr/>
+      </p:nvGrpSpPr>
+      <p:grpSpPr>
+        <a:xfrm xmlns:a="http://schemas.openxmlformats.org/drawingml/2006/main"/>
+      </p:grpSpPr>
+      <p:sp>
+        <p:nvSpPr>
+          <p:cNvPr id="2" name="Content Placeholder 2">
+            <a:extLst xmlns:a="http://schemas.openxmlformats.org/drawingml/2006/main">
+              <a:ext uri="{FF2B5EF4-FFF2-40B4-BE49-F238E27FC236}">
+                <a16:creationId xmlns:a16="http://schemas.microsoft.com/office/drawing/2014/main" id="{F9F982B7-E689-4A5C-89F6-7AC254215BEA}"/>
+              </a:ext>
+            </a:extLst>
+          </p:cNvPr>
+          <p:cNvSpPr>
+            <a:spLocks xmlns:a="http://schemas.openxmlformats.org/drawingml/2006/main" noGrp="1"/>
+          </p:cNvSpPr>
+          <p:nvPr>
+            <p:ph idx="1"/>
+          </p:nvPr>
+        </p:nvSpPr>
+        <p:spPr/>
+        <p:txBody>
+          <a:bodyPr xmlns:a="http://schemas.openxmlformats.org/drawingml/2006/main"/>
+          <a:lstStyle xmlns:a="http://schemas.openxmlformats.org/drawingml/2006/main"/>
+          <a:p xmlns:a="http://schemas.openxmlformats.org/drawingml/2006/main">
+            <a:pPr lvl="0">
+              <a:buNone/>
+            </a:pPr>
+            <a:r>
+              <a:t>Data binding and MVVM</a:t>
+            </a:r>
+          </a:p>
+          <a:p xmlns:a="http://schemas.openxmlformats.org/drawingml/2006/main">
+            <a:pPr lvl="0">
+              <a:buNone/>
+            </a:pPr>
+            <a:r>
+              <a:t>Search Microsoft Learn for this topic.</a:t>
+            </a:r>
+          </a:p>
+          <a:p xmlns:a="http://schemas.openxmlformats.org/drawingml/2006/main">
+            <a:pPr lvl="0">
+              <a:buNone/>
+            </a:pPr>
+            <a:r>
+              <a:t>Try one example in a small test page.</a:t>
+            </a:r>
+          </a:p>
+        </p:txBody>
+      </p:sp>
+      <p:sp>
+        <p:nvSpPr>
+          <p:cNvPr id="3" name="Title Placeholder 1">
+            <a:extLst xmlns:a="http://schemas.openxmlformats.org/drawingml/2006/main">
+              <a:ext uri="{FF2B5EF4-FFF2-40B4-BE49-F238E27FC236}">
+                <a16:creationId xmlns:a16="http://schemas.microsoft.com/office/drawing/2014/main" id="{2DF4F548-EDEF-186D-6633-AF1ABC814BC1}"/>
+              </a:ext>
+            </a:extLst>
+          </p:cNvPr>
+          <p:cNvSpPr>
+            <a:spLocks xmlns:a="http://schemas.openxmlformats.org/drawingml/2006/main" noGrp="1"/>
+          </p:cNvSpPr>
+          <p:nvPr>
+            <p:ph type="title" idx="0"/>
+          </p:nvPr>
+        </p:nvSpPr>
+        <p:spPr>
+          <a:prstGeom xmlns:a="http://schemas.openxmlformats.org/drawingml/2006/main" prst="rect">
+            <a:avLst/>
+          </a:prstGeom>
+        </p:spPr>
+        <p:txBody>
+          <a:bodyPr xmlns:a="http://schemas.openxmlformats.org/drawingml/2006/main" vert="horz" lIns="91440" tIns="45720" rIns="91440" bIns="45720" anchor="ctr">
+            <a:normAutofit fontScale="100000"/>
+          </a:bodyPr>
+          <a:lstStyle xmlns:a="http://schemas.openxmlformats.org/drawingml/2006/main"/>
+          <a:p xmlns:a="http://schemas.openxmlformats.org/drawingml/2006/main">
+            <a:r>
+              <a:t>Read more in MAUI documentation</a:t>
+            </a:r>
+            <a:endParaRPr/>
+          </a:p>
+        </p:txBody>
+      </p:sp>
+    </p:spTree>
+    <p:extLst>
+      <p:ext uri="{BB962C8B-B14F-4D97-AF65-F5344CB8AC3E}">
+        <p14:creationId xmlns:p14="http://schemas.microsoft.com/office/powerpoint/2010/main" val="742117034"/>
       </p:ext>
     </p:extLst>
   </p:cSld>
@@ -6982,7 +7485,7 @@
           <p:cNvPr id="2" name="Content Placeholder 2">
             <a:extLst xmlns:a="http://schemas.openxmlformats.org/drawingml/2006/main">
               <a:ext uri="{FF2B5EF4-FFF2-40B4-BE49-F238E27FC236}">
-                <a16:creationId xmlns:a16="http://schemas.microsoft.com/office/drawing/2014/main" id="{7F82553E-233C-4555-A6AC-8BF0D00BBEFF}"/>
+                <a16:creationId xmlns:a16="http://schemas.microsoft.com/office/drawing/2014/main" id="{F9F982B7-E689-4A5C-89F6-7AC254215BEA}"/>
               </a:ext>
             </a:extLst>
           </p:cNvPr>
@@ -7002,7 +7505,7 @@
               <a:buNone/>
             </a:pPr>
             <a:r>
-              <a:t>Create a .NET MAUI App in Visual Studio.</a:t>
+              <a:t>The model describes one material item.</a:t>
             </a:r>
           </a:p>
           <a:p xmlns:a="http://schemas.openxmlformats.org/drawingml/2006/main">
@@ -7010,7 +7513,15 @@
               <a:buNone/>
             </a:pPr>
             <a:r>
-              <a:t>Name it ProjectCostEstimator.</a:t>
+              <a:t>View models hold screen state and decisions.</a:t>
+            </a:r>
+          </a:p>
+          <a:p xmlns:a="http://schemas.openxmlformats.org/drawingml/2006/main">
+            <a:pPr lvl="0">
+              <a:buNone/>
+            </a:pPr>
+            <a:r>
+              <a:t>Services provide data and UI operations through interfaces.</a:t>
             </a:r>
           </a:p>
         </p:txBody>
@@ -7038,21 +7549,49 @@
         </p:spPr>
         <p:txBody>
           <a:bodyPr xmlns:a="http://schemas.openxmlformats.org/drawingml/2006/main" vert="horz" lIns="91440" tIns="45720" rIns="91440" bIns="45720" anchor="ctr">
-            <a:normAutofit fontScale="100000"/>
+            <a:normAutofit fontScale="86250"/>
           </a:bodyPr>
           <a:lstStyle xmlns:a="http://schemas.openxmlformats.org/drawingml/2006/main"/>
           <a:p xmlns:a="http://schemas.openxmlformats.org/drawingml/2006/main">
             <a:r>
-              <a:t>Step 1 New MAUI project</a:t>
+              <a:t>Start with responsibilities, then connect them</a:t>
             </a:r>
             <a:endParaRPr/>
           </a:p>
         </p:txBody>
       </p:sp>
+      <p:pic>
+        <p:nvPicPr>
+          <p:cNvPr id="4" name="">
+            <a:extLst xmlns:a="http://schemas.openxmlformats.org/drawingml/2006/main">
+              <a:ext uri="{FF2B5EF4-FFF2-40B4-BE49-F238E27FC236}">
+                <a16:creationId xmlns:a16="http://schemas.microsoft.com/office/drawing/2014/main" id="{DDB67E39-08A9-450A-94B5-7AE7881144C0}"/>
+              </a:ext>
+            </a:extLst>
+          </p:cNvPr>
+          <p:cNvPicPr>
+            <a:picLocks xmlns:a="http://schemas.openxmlformats.org/drawingml/2006/main" noChangeAspect="1"/>
+          </p:cNvPicPr>
+          <p:nvPr/>
+        </p:nvPicPr>
+        <p:blipFill>
+          <a:blip xmlns:r="http://schemas.openxmlformats.org/officeDocument/2006/relationships" xmlns:a="http://schemas.openxmlformats.org/drawingml/2006/main" r:embed="R7fa40bcd842444ca"/>
+          <a:stretch xmlns:a="http://schemas.openxmlformats.org/drawingml/2006/main"/>
+        </p:blipFill>
+        <p:spPr>
+          <a:xfrm xmlns:a="http://schemas.openxmlformats.org/drawingml/2006/main">
+            <a:off x="2667000" y="3800475"/>
+            <a:ext cx="6858000" cy="1828800"/>
+          </a:xfrm>
+          <a:prstGeom xmlns:a="http://schemas.openxmlformats.org/drawingml/2006/main" prst="rect">
+            <a:avLst/>
+          </a:prstGeom>
+        </p:spPr>
+      </p:pic>
     </p:spTree>
     <p:extLst>
       <p:ext uri="{BB962C8B-B14F-4D97-AF65-F5344CB8AC3E}">
-        <p14:creationId xmlns:p14="http://schemas.microsoft.com/office/powerpoint/2010/main" val="394745510"/>
+        <p14:creationId xmlns:p14="http://schemas.microsoft.com/office/powerpoint/2010/main" val="965862085"/>
       </p:ext>
     </p:extLst>
   </p:cSld>
@@ -7076,7 +7615,7 @@
           <p:cNvPr id="2" name="Content Placeholder 2">
             <a:extLst xmlns:a="http://schemas.openxmlformats.org/drawingml/2006/main">
               <a:ext uri="{FF2B5EF4-FFF2-40B4-BE49-F238E27FC236}">
-                <a16:creationId xmlns:a16="http://schemas.microsoft.com/office/drawing/2014/main" id="{7F82553E-233C-4555-A6AC-8BF0D00BBEFF}"/>
+                <a16:creationId xmlns:a16="http://schemas.microsoft.com/office/drawing/2014/main" id="{F9F982B7-E689-4A5C-89F6-7AC254215BEA}"/>
               </a:ext>
             </a:extLst>
           </p:cNvPr>
@@ -7096,7 +7635,7 @@
               <a:buNone/>
             </a:pPr>
             <a:r>
-              <a:t>The template app runs on Windows.</a:t>
+              <a:t>Build one working path before adding another.</a:t>
             </a:r>
           </a:p>
           <a:p xmlns:a="http://schemas.openxmlformats.org/drawingml/2006/main">
@@ -7104,7 +7643,15 @@
               <a:buNone/>
             </a:pPr>
             <a:r>
-              <a:t>Keep the reference closed for now.</a:t>
+              <a:t>Register dependencies in MauiProgram.</a:t>
+            </a:r>
+          </a:p>
+          <a:p xmlns:a="http://schemas.openxmlformats.org/drawingml/2006/main">
+            <a:pPr lvl="0">
+              <a:buNone/>
+            </a:pPr>
+            <a:r>
+              <a:t>Bind each page to its view model.</a:t>
             </a:r>
           </a:p>
         </p:txBody>
@@ -7137,7 +7684,7 @@
           <a:lstStyle xmlns:a="http://schemas.openxmlformats.org/drawingml/2006/main"/>
           <a:p xmlns:a="http://schemas.openxmlformats.org/drawingml/2006/main">
             <a:r>
-              <a:t>Step 1 Check</a:t>
+              <a:t>From C# to the screen</a:t>
             </a:r>
             <a:endParaRPr/>
           </a:p>
@@ -7146,7 +7693,7 @@
     </p:spTree>
     <p:extLst>
       <p:ext uri="{BB962C8B-B14F-4D97-AF65-F5344CB8AC3E}">
-        <p14:creationId xmlns:p14="http://schemas.microsoft.com/office/powerpoint/2010/main" val="1169658346"/>
+        <p14:creationId xmlns:p14="http://schemas.microsoft.com/office/powerpoint/2010/main" val="435955995"/>
       </p:ext>
     </p:extLst>
   </p:cSld>
@@ -7170,7 +7717,7 @@
           <p:cNvPr id="2" name="Content Placeholder 2">
             <a:extLst xmlns:a="http://schemas.openxmlformats.org/drawingml/2006/main">
               <a:ext uri="{FF2B5EF4-FFF2-40B4-BE49-F238E27FC236}">
-                <a16:creationId xmlns:a16="http://schemas.microsoft.com/office/drawing/2014/main" id="{7F82553E-233C-4555-A6AC-8BF0D00BBEFF}"/>
+                <a16:creationId xmlns:a16="http://schemas.microsoft.com/office/drawing/2014/main" id="{F9F982B7-E689-4A5C-89F6-7AC254215BEA}"/>
               </a:ext>
             </a:extLst>
           </p:cNvPr>
@@ -7190,7 +7737,7 @@
               <a:buNone/>
             </a:pPr>
             <a:r>
-              <a:t>Views show controls and handle platform UI.</a:t>
+              <a:t>Create a .NET MAUI App in Visual Studio.</a:t>
             </a:r>
           </a:p>
           <a:p xmlns:a="http://schemas.openxmlformats.org/drawingml/2006/main">
@@ -7198,15 +7745,7 @@
               <a:buNone/>
             </a:pPr>
             <a:r>
-              <a:t>View models own form and list decisions.</a:t>
-            </a:r>
-          </a:p>
-          <a:p xmlns:a="http://schemas.openxmlformats.org/drawingml/2006/main">
-            <a:pPr lvl="0">
-              <a:buNone/>
-            </a:pPr>
-            <a:r>
-              <a:t>Services own storage.</a:t>
+              <a:t>Name it ProjectCostEstimator.</a:t>
             </a:r>
           </a:p>
         </p:txBody>
@@ -7239,7 +7778,7 @@
           <a:lstStyle xmlns:a="http://schemas.openxmlformats.org/drawingml/2006/main"/>
           <a:p xmlns:a="http://schemas.openxmlformats.org/drawingml/2006/main">
             <a:r>
-              <a:t>Step 2 Responsibilities</a:t>
+              <a:t>Step 1: New MAUI project</a:t>
             </a:r>
             <a:endParaRPr/>
           </a:p>
@@ -7248,7 +7787,7 @@
     </p:spTree>
     <p:extLst>
       <p:ext uri="{BB962C8B-B14F-4D97-AF65-F5344CB8AC3E}">
-        <p14:creationId xmlns:p14="http://schemas.microsoft.com/office/powerpoint/2010/main" val="879447244"/>
+        <p14:creationId xmlns:p14="http://schemas.microsoft.com/office/powerpoint/2010/main" val="253890910"/>
       </p:ext>
     </p:extLst>
   </p:cSld>
@@ -7272,7 +7811,7 @@
           <p:cNvPr id="2" name="Content Placeholder 2">
             <a:extLst xmlns:a="http://schemas.openxmlformats.org/drawingml/2006/main">
               <a:ext uri="{FF2B5EF4-FFF2-40B4-BE49-F238E27FC236}">
-                <a16:creationId xmlns:a16="http://schemas.microsoft.com/office/drawing/2014/main" id="{7F82553E-233C-4555-A6AC-8BF0D00BBEFF}"/>
+                <a16:creationId xmlns:a16="http://schemas.microsoft.com/office/drawing/2014/main" id="{F9F982B7-E689-4A5C-89F6-7AC254215BEA}"/>
               </a:ext>
             </a:extLst>
           </p:cNvPr>
@@ -7292,7 +7831,7 @@
               <a:buNone/>
             </a:pPr>
             <a:r>
-              <a:t>Draw the three layers.</a:t>
+              <a:t>The template app runs on Windows.</a:t>
             </a:r>
           </a:p>
           <a:p xmlns:a="http://schemas.openxmlformats.org/drawingml/2006/main">
@@ -7300,7 +7839,7 @@
               <a:buNone/>
             </a:pPr>
             <a:r>
-              <a:t>Explain where navigation belongs.</a:t>
+              <a:t>Keep the reference closed for now.</a:t>
             </a:r>
           </a:p>
         </p:txBody>
@@ -7333,44 +7872,16 @@
           <a:lstStyle xmlns:a="http://schemas.openxmlformats.org/drawingml/2006/main"/>
           <a:p xmlns:a="http://schemas.openxmlformats.org/drawingml/2006/main">
             <a:r>
-              <a:t>Step 2 Check</a:t>
+              <a:t>Step 1: What changed?</a:t>
             </a:r>
             <a:endParaRPr/>
           </a:p>
         </p:txBody>
       </p:sp>
-      <p:pic>
-        <p:nvPicPr>
-          <p:cNvPr id="4" name="">
-            <a:extLst xmlns:a="http://schemas.openxmlformats.org/drawingml/2006/main">
-              <a:ext uri="{FF2B5EF4-FFF2-40B4-BE49-F238E27FC236}">
-                <a16:creationId xmlns:a16="http://schemas.microsoft.com/office/drawing/2014/main" id="{7B89496D-876F-4A0F-8F4D-88F53A839843}"/>
-              </a:ext>
-            </a:extLst>
-          </p:cNvPr>
-          <p:cNvPicPr>
-            <a:picLocks xmlns:a="http://schemas.openxmlformats.org/drawingml/2006/main" noChangeAspect="1"/>
-          </p:cNvPicPr>
-          <p:nvPr/>
-        </p:nvPicPr>
-        <p:blipFill>
-          <a:blip xmlns:r="http://schemas.openxmlformats.org/officeDocument/2006/relationships" xmlns:a="http://schemas.openxmlformats.org/drawingml/2006/main" r:embed="R3e526b3e12804346"/>
-          <a:stretch xmlns:a="http://schemas.openxmlformats.org/drawingml/2006/main"/>
-        </p:blipFill>
-        <p:spPr>
-          <a:xfrm xmlns:a="http://schemas.openxmlformats.org/drawingml/2006/main">
-            <a:off x="2667000" y="3800475"/>
-            <a:ext cx="6858000" cy="1828800"/>
-          </a:xfrm>
-          <a:prstGeom xmlns:a="http://schemas.openxmlformats.org/drawingml/2006/main" prst="rect">
-            <a:avLst/>
-          </a:prstGeom>
-        </p:spPr>
-      </p:pic>
     </p:spTree>
     <p:extLst>
       <p:ext uri="{BB962C8B-B14F-4D97-AF65-F5344CB8AC3E}">
-        <p14:creationId xmlns:p14="http://schemas.microsoft.com/office/powerpoint/2010/main" val="781538494"/>
+        <p14:creationId xmlns:p14="http://schemas.microsoft.com/office/powerpoint/2010/main" val="1738529249"/>
       </p:ext>
     </p:extLst>
   </p:cSld>
@@ -7394,7 +7905,7 @@
           <p:cNvPr id="2" name="Content Placeholder 2">
             <a:extLst xmlns:a="http://schemas.openxmlformats.org/drawingml/2006/main">
               <a:ext uri="{FF2B5EF4-FFF2-40B4-BE49-F238E27FC236}">
-                <a16:creationId xmlns:a16="http://schemas.microsoft.com/office/drawing/2014/main" id="{7F82553E-233C-4555-A6AC-8BF0D00BBEFF}"/>
+                <a16:creationId xmlns:a16="http://schemas.microsoft.com/office/drawing/2014/main" id="{F9F982B7-E689-4A5C-89F6-7AC254215BEA}"/>
               </a:ext>
             </a:extLst>
           </p:cNvPr>
@@ -7414,7 +7925,7 @@
               <a:buNone/>
             </a:pPr>
             <a:r>
-              <a:t>MaterialItem holds item data.</a:t>
+              <a:t>Views show controls and handle platform UI.</a:t>
             </a:r>
           </a:p>
           <a:p xmlns:a="http://schemas.openxmlformats.org/drawingml/2006/main">
@@ -7422,7 +7933,15 @@
               <a:buNone/>
             </a:pPr>
             <a:r>
-              <a:t>IBomService states storage operations.</a:t>
+              <a:t>View models own form and list decisions.</a:t>
+            </a:r>
+          </a:p>
+          <a:p xmlns:a="http://schemas.openxmlformats.org/drawingml/2006/main">
+            <a:pPr lvl="0">
+              <a:buNone/>
+            </a:pPr>
+            <a:r>
+              <a:t>Services own storage.</a:t>
             </a:r>
           </a:p>
         </p:txBody>
@@ -7455,7 +7974,7 @@
           <a:lstStyle xmlns:a="http://schemas.openxmlformats.org/drawingml/2006/main"/>
           <a:p xmlns:a="http://schemas.openxmlformats.org/drawingml/2006/main">
             <a:r>
-              <a:t>Step 3 Model and service</a:t>
+              <a:t>Step 2: Responsibilities</a:t>
             </a:r>
             <a:endParaRPr/>
           </a:p>
@@ -7464,7 +7983,7 @@
     </p:spTree>
     <p:extLst>
       <p:ext uri="{BB962C8B-B14F-4D97-AF65-F5344CB8AC3E}">
-        <p14:creationId xmlns:p14="http://schemas.microsoft.com/office/powerpoint/2010/main" val="2050887104"/>
+        <p14:creationId xmlns:p14="http://schemas.microsoft.com/office/powerpoint/2010/main" val="1444067708"/>
       </p:ext>
     </p:extLst>
   </p:cSld>
@@ -7488,7 +8007,7 @@
           <p:cNvPr id="2" name="Content Placeholder 2">
             <a:extLst xmlns:a="http://schemas.openxmlformats.org/drawingml/2006/main">
               <a:ext uri="{FF2B5EF4-FFF2-40B4-BE49-F238E27FC236}">
-                <a16:creationId xmlns:a16="http://schemas.microsoft.com/office/drawing/2014/main" id="{7F82553E-233C-4555-A6AC-8BF0D00BBEFF}"/>
+                <a16:creationId xmlns:a16="http://schemas.microsoft.com/office/drawing/2014/main" id="{F9F982B7-E689-4A5C-89F6-7AC254215BEA}"/>
               </a:ext>
             </a:extLst>
           </p:cNvPr>
@@ -7508,7 +8027,7 @@
               <a:buNone/>
             </a:pPr>
             <a:r>
-              <a:t>A sample item has the right total.</a:t>
+              <a:t>Draw the three layers.</a:t>
             </a:r>
           </a:p>
           <a:p xmlns:a="http://schemas.openxmlformats.org/drawingml/2006/main">
@@ -7516,7 +8035,7 @@
               <a:buNone/>
             </a:pPr>
             <a:r>
-              <a:t>The in-memory service changes the list.</a:t>
+              <a:t>Explain where navigation belongs.</a:t>
             </a:r>
           </a:p>
         </p:txBody>
@@ -7549,7 +8068,7 @@
           <a:lstStyle xmlns:a="http://schemas.openxmlformats.org/drawingml/2006/main"/>
           <a:p xmlns:a="http://schemas.openxmlformats.org/drawingml/2006/main">
             <a:r>
-              <a:t>Step 3 Check</a:t>
+              <a:t>Step 2: What changed?</a:t>
             </a:r>
             <a:endParaRPr/>
           </a:p>
@@ -7558,7 +8077,7 @@
     </p:spTree>
     <p:extLst>
       <p:ext uri="{BB962C8B-B14F-4D97-AF65-F5344CB8AC3E}">
-        <p14:creationId xmlns:p14="http://schemas.microsoft.com/office/powerpoint/2010/main" val="1216362039"/>
+        <p14:creationId xmlns:p14="http://schemas.microsoft.com/office/powerpoint/2010/main" val="977367831"/>
       </p:ext>
     </p:extLst>
   </p:cSld>
@@ -7582,7 +8101,7 @@
           <p:cNvPr id="2" name="Content Placeholder 2">
             <a:extLst xmlns:a="http://schemas.openxmlformats.org/drawingml/2006/main">
               <a:ext uri="{FF2B5EF4-FFF2-40B4-BE49-F238E27FC236}">
-                <a16:creationId xmlns:a16="http://schemas.microsoft.com/office/drawing/2014/main" id="{7F82553E-233C-4555-A6AC-8BF0D00BBEFF}"/>
+                <a16:creationId xmlns:a16="http://schemas.microsoft.com/office/drawing/2014/main" id="{F9F982B7-E689-4A5C-89F6-7AC254215BEA}"/>
               </a:ext>
             </a:extLst>
           </p:cNvPr>
@@ -7602,7 +8121,7 @@
               <a:buNone/>
             </a:pPr>
             <a:r>
-              <a:t>Generated properties hold form state.</a:t>
+              <a:t>MaterialItem holds item data.</a:t>
             </a:r>
           </a:p>
           <a:p xmlns:a="http://schemas.openxmlformats.org/drawingml/2006/main">
@@ -7610,7 +8129,7 @@
               <a:buNone/>
             </a:pPr>
             <a:r>
-              <a:t>Validation controls Submit.</a:t>
+              <a:t>IBomService states storage operations.</a:t>
             </a:r>
           </a:p>
         </p:txBody>
@@ -7643,7 +8162,7 @@
           <a:lstStyle xmlns:a="http://schemas.openxmlformats.org/drawingml/2006/main"/>
           <a:p xmlns:a="http://schemas.openxmlformats.org/drawingml/2006/main">
             <a:r>
-              <a:t>Step 5 Editor view model</a:t>
+              <a:t>Step 3: Model and service</a:t>
             </a:r>
             <a:endParaRPr/>
           </a:p>
@@ -7652,7 +8171,7 @@
     </p:spTree>
     <p:extLst>
       <p:ext uri="{BB962C8B-B14F-4D97-AF65-F5344CB8AC3E}">
-        <p14:creationId xmlns:p14="http://schemas.microsoft.com/office/powerpoint/2010/main" val="1913205888"/>
+        <p14:creationId xmlns:p14="http://schemas.microsoft.com/office/powerpoint/2010/main" val="544321432"/>
       </p:ext>
     </p:extLst>
   </p:cSld>
